--- a/Reports/Slides (Non-Fiction)/Non-Fiction Recommender.pptx
+++ b/Reports/Slides (Non-Fiction)/Non-Fiction Recommender.pptx
@@ -12,6 +12,7 @@
     <p:sldId id="260" r:id="rId11"/>
     <p:sldId id="261" r:id="rId12"/>
     <p:sldId id="262" r:id="rId13"/>
+    <p:sldId id="263" r:id="rId14"/>
   </p:sldIdLst>
   <p:sldSz cx="12188952" cy="6858000" type="screen4x3"/>
   <p:notesSz cx="6858000" cy="9144000"/>
@@ -3364,7 +3365,7 @@
                   <a:srgbClr val="D4C5A9"/>
                 </a:solidFill>
               </a:rPr>
-              <a:t>1 / 7</a:t>
+              <a:t>1 / 8</a:t>
             </a:r>
           </a:p>
         </p:txBody>
@@ -3789,7 +3790,7 @@
                   <a:srgbClr val="D4C5A9"/>
                 </a:solidFill>
               </a:rPr>
-              <a:t>2 / 7</a:t>
+              <a:t>2 / 8</a:t>
             </a:r>
           </a:p>
         </p:txBody>
@@ -3935,7 +3936,7 @@
                   <a:srgbClr val="F5D78E"/>
                 </a:solidFill>
               </a:rPr>
-              <a:t>THE METHOD</a:t>
+              <a:t>THE DATA</a:t>
             </a:r>
           </a:p>
         </p:txBody>
@@ -3969,27 +3970,240 @@
                   <a:srgbClr val="F5F0E8"/>
                 </a:solidFill>
               </a:rPr>
-              <a:t>How the recommender works</a:t>
-            </a:r>
-          </a:p>
-        </p:txBody>
-      </p:sp>
-      <p:sp>
-        <p:nvSpPr>
-          <p:cNvPr id="6" name="Rectangle 5"/>
+              <a:t>Where the data comes from</a:t>
+            </a:r>
+          </a:p>
+        </p:txBody>
+      </p:sp>
+      <p:sp>
+        <p:nvSpPr>
+          <p:cNvPr id="6" name="TextBox 5"/>
+          <p:cNvSpPr txBox="1"/>
+          <p:nvPr/>
+        </p:nvSpPr>
+        <p:spPr>
+          <a:xfrm>
+            <a:off x="640080" y="1600200"/>
+            <a:ext cx="5303520" cy="457200"/>
+          </a:xfrm>
+          <a:prstGeom prst="rect">
+            <a:avLst/>
+          </a:prstGeom>
+          <a:noFill/>
+        </p:spPr>
+        <p:txBody>
+          <a:bodyPr wrap="square">
+            <a:spAutoFit/>
+          </a:bodyPr>
+          <a:lstStyle/>
+          <a:p>
+            <a:pPr algn="l"/>
+            <a:r>
+              <a:rPr sz="1700" b="1" i="0">
+                <a:solidFill>
+                  <a:srgbClr val="F5D78E"/>
+                </a:solidFill>
+              </a:rPr>
+              <a:t>Collection</a:t>
+            </a:r>
+          </a:p>
+        </p:txBody>
+      </p:sp>
+      <p:sp>
+        <p:nvSpPr>
+          <p:cNvPr id="7" name="TextBox 6"/>
+          <p:cNvSpPr txBox="1"/>
+          <p:nvPr/>
+        </p:nvSpPr>
+        <p:spPr>
+          <a:xfrm>
+            <a:off x="640080" y="2011680"/>
+            <a:ext cx="5303520" cy="3840480"/>
+          </a:xfrm>
+          <a:prstGeom prst="rect">
+            <a:avLst/>
+          </a:prstGeom>
+          <a:noFill/>
+        </p:spPr>
+        <p:txBody>
+          <a:bodyPr wrap="square">
+            <a:spAutoFit/>
+          </a:bodyPr>
+          <a:lstStyle/>
+          <a:p>
+            <a:pPr algn="l"/>
+            <a:r>
+              <a:rPr sz="1600">
+                <a:solidFill>
+                  <a:srgbClr val="F5F0E8"/>
+                </a:solidFill>
+              </a:rPr>
+              <a:t>  •  Open Library API (openlibrary.org/search.json) — queried author-by-author across 39 curated thinkers; up to 50 results each → ~1,316 records.</a:t>
+            </a:r>
+          </a:p>
+          <a:p>
+            <a:pPr algn="l"/>
+            <a:r>
+              <a:rPr sz="1600">
+                <a:solidFill>
+                  <a:srgbClr val="F5F0E8"/>
+                </a:solidFill>
+              </a:rPr>
+              <a:t>  •  Goodreads scraping — curl + BeautifulSoup; paginated search results, up to 10 pages per author → ~5,487 raw records.</a:t>
+            </a:r>
+          </a:p>
+          <a:p>
+            <a:pPr algn="l"/>
+            <a:r>
+              <a:rPr sz="1600">
+                <a:solidFill>
+                  <a:srgbClr val="F5F0E8"/>
+                </a:solidFill>
+              </a:rPr>
+              <a:t>  •  Description enrichment — each Goodreads book page was visited individually to fetch the full synopsis; progress saved every 50 books for resilience.</a:t>
+            </a:r>
+          </a:p>
+          <a:p>
+            <a:pPr algn="l"/>
+            <a:r>
+              <a:rPr sz="1600">
+                <a:solidFill>
+                  <a:srgbClr val="F5F0E8"/>
+                </a:solidFill>
+              </a:rPr>
+              <a:t>  •  Authors span: Black American thought, African/Caribbean theory, Latin American thinkers, feminist &amp; queer theory, contemporary left (Chomsky, Klein, Graeber…).</a:t>
+            </a:r>
+          </a:p>
+        </p:txBody>
+      </p:sp>
+      <p:sp>
+        <p:nvSpPr>
+          <p:cNvPr id="8" name="TextBox 7"/>
+          <p:cNvSpPr txBox="1"/>
+          <p:nvPr/>
+        </p:nvSpPr>
+        <p:spPr>
+          <a:xfrm>
+            <a:off x="6217920" y="1600200"/>
+            <a:ext cx="5486400" cy="457200"/>
+          </a:xfrm>
+          <a:prstGeom prst="rect">
+            <a:avLst/>
+          </a:prstGeom>
+          <a:noFill/>
+        </p:spPr>
+        <p:txBody>
+          <a:bodyPr wrap="square">
+            <a:spAutoFit/>
+          </a:bodyPr>
+          <a:lstStyle/>
+          <a:p>
+            <a:pPr algn="l"/>
+            <a:r>
+              <a:rPr sz="1700" b="1" i="0">
+                <a:solidFill>
+                  <a:srgbClr val="F5D78E"/>
+                </a:solidFill>
+              </a:rPr>
+              <a:t>Cleaning</a:t>
+            </a:r>
+          </a:p>
+        </p:txBody>
+      </p:sp>
+      <p:sp>
+        <p:nvSpPr>
+          <p:cNvPr id="9" name="TextBox 8"/>
+          <p:cNvSpPr txBox="1"/>
+          <p:nvPr/>
+        </p:nvSpPr>
+        <p:spPr>
+          <a:xfrm>
+            <a:off x="6217920" y="2011680"/>
+            <a:ext cx="5486400" cy="3840480"/>
+          </a:xfrm>
+          <a:prstGeom prst="rect">
+            <a:avLst/>
+          </a:prstGeom>
+          <a:noFill/>
+        </p:spPr>
+        <p:txBody>
+          <a:bodyPr wrap="square">
+            <a:spAutoFit/>
+          </a:bodyPr>
+          <a:lstStyle/>
+          <a:p>
+            <a:pPr algn="l"/>
+            <a:r>
+              <a:rPr sz="1600">
+                <a:solidFill>
+                  <a:srgbClr val="F5F0E8"/>
+                </a:solidFill>
+              </a:rPr>
+              <a:t>  •  Stripped whitespace; standardised author name casing.</a:t>
+            </a:r>
+          </a:p>
+          <a:p>
+            <a:pPr algn="l"/>
+            <a:r>
+              <a:rPr sz="1600">
+                <a:solidFill>
+                  <a:srgbClr val="F5F0E8"/>
+                </a:solidFill>
+              </a:rPr>
+              <a:t>  •  Dropped rows missing title, author, or description (1,314 books had no synopsis and were removed).</a:t>
+            </a:r>
+          </a:p>
+          <a:p>
+            <a:pPr algn="l"/>
+            <a:r>
+              <a:rPr sz="1600">
+                <a:solidFill>
+                  <a:srgbClr val="F5F0E8"/>
+                </a:solidFill>
+              </a:rPr>
+              <a:t>  •  Language detection with langdetect — kept English only; 1,211 non-English books removed.</a:t>
+            </a:r>
+          </a:p>
+          <a:p>
+            <a:pPr algn="l"/>
+            <a:r>
+              <a:rPr sz="1600">
+                <a:solidFill>
+                  <a:srgbClr val="F5F0E8"/>
+                </a:solidFill>
+              </a:rPr>
+              <a:t>  •  Deduplication on title + author.</a:t>
+            </a:r>
+          </a:p>
+          <a:p>
+            <a:pPr algn="l"/>
+            <a:r>
+              <a:rPr sz="1600">
+                <a:solidFill>
+                  <a:srgbClr val="F5F0E8"/>
+                </a:solidFill>
+              </a:rPr>
+              <a:t>  •  Final dataset: 2,960 books with titles, authors, and full descriptions.</a:t>
+            </a:r>
+          </a:p>
+        </p:txBody>
+      </p:sp>
+      <p:sp>
+        <p:nvSpPr>
+          <p:cNvPr id="10" name="Rectangle 9"/>
           <p:cNvSpPr/>
           <p:nvPr/>
         </p:nvSpPr>
         <p:spPr>
           <a:xfrm>
-            <a:off x="502920" y="1920240"/>
-            <a:ext cx="2103120" cy="4114800"/>
+            <a:off x="5943600" y="1554480"/>
+            <a:ext cx="36576" cy="4572000"/>
           </a:xfrm>
           <a:prstGeom prst="rect">
             <a:avLst/>
           </a:prstGeom>
           <a:solidFill>
-            <a:srgbClr val="2E1E10"/>
+            <a:srgbClr val="5C4208"/>
           </a:solidFill>
           <a:ln>
             <a:noFill/>
@@ -4019,14 +4233,14 @@
       </p:sp>
       <p:sp>
         <p:nvSpPr>
-          <p:cNvPr id="7" name="TextBox 6"/>
+          <p:cNvPr id="11" name="TextBox 10"/>
           <p:cNvSpPr txBox="1"/>
           <p:nvPr/>
         </p:nvSpPr>
         <p:spPr>
           <a:xfrm>
-            <a:off x="612648" y="2011680"/>
-            <a:ext cx="1920239" cy="502920"/>
+            <a:off x="640080" y="5532120"/>
+            <a:ext cx="10972800" cy="640080"/>
           </a:xfrm>
           <a:prstGeom prst="rect">
             <a:avLst/>
@@ -4039,28 +4253,28 @@
           </a:bodyPr>
           <a:lstStyle/>
           <a:p>
-            <a:pPr algn="l"/>
-            <a:r>
-              <a:rPr sz="2800" b="1" i="0">
+            <a:pPr algn="ctr"/>
+            <a:r>
+              <a:rPr sz="1700" b="0" i="1">
                 <a:solidFill>
                   <a:srgbClr val="F5D78E"/>
                 </a:solidFill>
               </a:rPr>
-              <a:t>01</a:t>
-            </a:r>
-          </a:p>
-        </p:txBody>
-      </p:sp>
-      <p:sp>
-        <p:nvSpPr>
-          <p:cNvPr id="8" name="TextBox 7"/>
+              <a:t>39 authors  ·  2 sources  ·  ~6,800 raw records  →  2,960 final books</a:t>
+            </a:r>
+          </a:p>
+        </p:txBody>
+      </p:sp>
+      <p:sp>
+        <p:nvSpPr>
+          <p:cNvPr id="12" name="TextBox 11"/>
           <p:cNvSpPr txBox="1"/>
           <p:nvPr/>
         </p:nvSpPr>
         <p:spPr>
           <a:xfrm>
-            <a:off x="612648" y="2514600"/>
-            <a:ext cx="1920239" cy="502920"/>
+            <a:off x="11155680" y="6492240"/>
+            <a:ext cx="914400" cy="320040"/>
           </a:xfrm>
           <a:prstGeom prst="rect">
             <a:avLst/>
@@ -4073,667 +4287,14 @@
           </a:bodyPr>
           <a:lstStyle/>
           <a:p>
-            <a:pPr algn="l"/>
-            <a:r>
-              <a:rPr sz="1700" b="1" i="0">
-                <a:solidFill>
-                  <a:srgbClr val="F5F0E8"/>
-                </a:solidFill>
-              </a:rPr>
-              <a:t>Collect</a:t>
-            </a:r>
-          </a:p>
-        </p:txBody>
-      </p:sp>
-      <p:sp>
-        <p:nvSpPr>
-          <p:cNvPr id="9" name="TextBox 8"/>
-          <p:cNvSpPr txBox="1"/>
-          <p:nvPr/>
-        </p:nvSpPr>
-        <p:spPr>
-          <a:xfrm>
-            <a:off x="612648" y="3063240"/>
-            <a:ext cx="1920239" cy="2560320"/>
-          </a:xfrm>
-          <a:prstGeom prst="rect">
-            <a:avLst/>
-          </a:prstGeom>
-          <a:noFill/>
-        </p:spPr>
-        <p:txBody>
-          <a:bodyPr wrap="square">
-            <a:spAutoFit/>
-          </a:bodyPr>
-          <a:lstStyle/>
-          <a:p>
-            <a:pPr algn="l"/>
-            <a:r>
-              <a:rPr sz="1400" b="0" i="0">
+            <a:pPr algn="r"/>
+            <a:r>
+              <a:rPr sz="1100" b="0" i="0">
                 <a:solidFill>
                   <a:srgbClr val="D4C5A9"/>
                 </a:solidFill>
               </a:rPr>
-              <a:t>~3,034 books scraped from APIs and the web.
-Titles, authors, descriptions, publication years.</a:t>
-            </a:r>
-          </a:p>
-        </p:txBody>
-      </p:sp>
-      <p:sp>
-        <p:nvSpPr>
-          <p:cNvPr id="10" name="Rectangle 9"/>
-          <p:cNvSpPr/>
-          <p:nvPr/>
-        </p:nvSpPr>
-        <p:spPr>
-          <a:xfrm>
-            <a:off x="2715768" y="1920240"/>
-            <a:ext cx="2103120" cy="4114800"/>
-          </a:xfrm>
-          <a:prstGeom prst="rect">
-            <a:avLst/>
-          </a:prstGeom>
-          <a:solidFill>
-            <a:srgbClr val="2E1E10"/>
-          </a:solidFill>
-          <a:ln>
-            <a:noFill/>
-          </a:ln>
-        </p:spPr>
-        <p:style>
-          <a:lnRef idx="1">
-            <a:schemeClr val="accent1"/>
-          </a:lnRef>
-          <a:fillRef idx="3">
-            <a:schemeClr val="accent1"/>
-          </a:fillRef>
-          <a:effectRef idx="2">
-            <a:schemeClr val="accent1"/>
-          </a:effectRef>
-          <a:fontRef idx="minor">
-            <a:schemeClr val="lt1"/>
-          </a:fontRef>
-        </p:style>
-        <p:txBody>
-          <a:bodyPr rtlCol="0" anchor="ctr"/>
-          <a:lstStyle/>
-          <a:p>
-            <a:pPr algn="ctr"/>
-          </a:p>
-        </p:txBody>
-      </p:sp>
-      <p:sp>
-        <p:nvSpPr>
-          <p:cNvPr id="11" name="TextBox 10"/>
-          <p:cNvSpPr txBox="1"/>
-          <p:nvPr/>
-        </p:nvSpPr>
-        <p:spPr>
-          <a:xfrm>
-            <a:off x="2825496" y="2011680"/>
-            <a:ext cx="1920239" cy="502920"/>
-          </a:xfrm>
-          <a:prstGeom prst="rect">
-            <a:avLst/>
-          </a:prstGeom>
-          <a:noFill/>
-        </p:spPr>
-        <p:txBody>
-          <a:bodyPr wrap="square">
-            <a:spAutoFit/>
-          </a:bodyPr>
-          <a:lstStyle/>
-          <a:p>
-            <a:pPr algn="l"/>
-            <a:r>
-              <a:rPr sz="2800" b="1" i="0">
-                <a:solidFill>
-                  <a:srgbClr val="F5D78E"/>
-                </a:solidFill>
-              </a:rPr>
-              <a:t>02</a:t>
-            </a:r>
-          </a:p>
-        </p:txBody>
-      </p:sp>
-      <p:sp>
-        <p:nvSpPr>
-          <p:cNvPr id="12" name="TextBox 11"/>
-          <p:cNvSpPr txBox="1"/>
-          <p:nvPr/>
-        </p:nvSpPr>
-        <p:spPr>
-          <a:xfrm>
-            <a:off x="2825496" y="2514600"/>
-            <a:ext cx="1920239" cy="502920"/>
-          </a:xfrm>
-          <a:prstGeom prst="rect">
-            <a:avLst/>
-          </a:prstGeom>
-          <a:noFill/>
-        </p:spPr>
-        <p:txBody>
-          <a:bodyPr wrap="square">
-            <a:spAutoFit/>
-          </a:bodyPr>
-          <a:lstStyle/>
-          <a:p>
-            <a:pPr algn="l"/>
-            <a:r>
-              <a:rPr sz="1700" b="1" i="0">
-                <a:solidFill>
-                  <a:srgbClr val="F5F0E8"/>
-                </a:solidFill>
-              </a:rPr>
-              <a:t>Clean</a:t>
-            </a:r>
-          </a:p>
-        </p:txBody>
-      </p:sp>
-      <p:sp>
-        <p:nvSpPr>
-          <p:cNvPr id="13" name="TextBox 12"/>
-          <p:cNvSpPr txBox="1"/>
-          <p:nvPr/>
-        </p:nvSpPr>
-        <p:spPr>
-          <a:xfrm>
-            <a:off x="2825496" y="3063240"/>
-            <a:ext cx="1920239" cy="2560320"/>
-          </a:xfrm>
-          <a:prstGeom prst="rect">
-            <a:avLst/>
-          </a:prstGeom>
-          <a:noFill/>
-        </p:spPr>
-        <p:txBody>
-          <a:bodyPr wrap="square">
-            <a:spAutoFit/>
-          </a:bodyPr>
-          <a:lstStyle/>
-          <a:p>
-            <a:pPr algn="l"/>
-            <a:r>
-              <a:rPr sz="1400" b="0" i="0">
-                <a:solidFill>
-                  <a:srgbClr val="D4C5A9"/>
-                </a:solidFill>
-              </a:rPr>
-              <a:t>Deduplication, missing-value handling,
-normalising formats across sources.</a:t>
-            </a:r>
-          </a:p>
-        </p:txBody>
-      </p:sp>
-      <p:sp>
-        <p:nvSpPr>
-          <p:cNvPr id="14" name="Rectangle 13"/>
-          <p:cNvSpPr/>
-          <p:nvPr/>
-        </p:nvSpPr>
-        <p:spPr>
-          <a:xfrm>
-            <a:off x="4928616" y="1920240"/>
-            <a:ext cx="2103120" cy="4114800"/>
-          </a:xfrm>
-          <a:prstGeom prst="rect">
-            <a:avLst/>
-          </a:prstGeom>
-          <a:solidFill>
-            <a:srgbClr val="2E1E10"/>
-          </a:solidFill>
-          <a:ln>
-            <a:noFill/>
-          </a:ln>
-        </p:spPr>
-        <p:style>
-          <a:lnRef idx="1">
-            <a:schemeClr val="accent1"/>
-          </a:lnRef>
-          <a:fillRef idx="3">
-            <a:schemeClr val="accent1"/>
-          </a:fillRef>
-          <a:effectRef idx="2">
-            <a:schemeClr val="accent1"/>
-          </a:effectRef>
-          <a:fontRef idx="minor">
-            <a:schemeClr val="lt1"/>
-          </a:fontRef>
-        </p:style>
-        <p:txBody>
-          <a:bodyPr rtlCol="0" anchor="ctr"/>
-          <a:lstStyle/>
-          <a:p>
-            <a:pPr algn="ctr"/>
-          </a:p>
-        </p:txBody>
-      </p:sp>
-      <p:sp>
-        <p:nvSpPr>
-          <p:cNvPr id="15" name="TextBox 14"/>
-          <p:cNvSpPr txBox="1"/>
-          <p:nvPr/>
-        </p:nvSpPr>
-        <p:spPr>
-          <a:xfrm>
-            <a:off x="5038344" y="2011680"/>
-            <a:ext cx="1920239" cy="502920"/>
-          </a:xfrm>
-          <a:prstGeom prst="rect">
-            <a:avLst/>
-          </a:prstGeom>
-          <a:noFill/>
-        </p:spPr>
-        <p:txBody>
-          <a:bodyPr wrap="square">
-            <a:spAutoFit/>
-          </a:bodyPr>
-          <a:lstStyle/>
-          <a:p>
-            <a:pPr algn="l"/>
-            <a:r>
-              <a:rPr sz="2800" b="1" i="0">
-                <a:solidFill>
-                  <a:srgbClr val="F5D78E"/>
-                </a:solidFill>
-              </a:rPr>
-              <a:t>03</a:t>
-            </a:r>
-          </a:p>
-        </p:txBody>
-      </p:sp>
-      <p:sp>
-        <p:nvSpPr>
-          <p:cNvPr id="16" name="TextBox 15"/>
-          <p:cNvSpPr txBox="1"/>
-          <p:nvPr/>
-        </p:nvSpPr>
-        <p:spPr>
-          <a:xfrm>
-            <a:off x="5038344" y="2514600"/>
-            <a:ext cx="1920239" cy="502920"/>
-          </a:xfrm>
-          <a:prstGeom prst="rect">
-            <a:avLst/>
-          </a:prstGeom>
-          <a:noFill/>
-        </p:spPr>
-        <p:txBody>
-          <a:bodyPr wrap="square">
-            <a:spAutoFit/>
-          </a:bodyPr>
-          <a:lstStyle/>
-          <a:p>
-            <a:pPr algn="l"/>
-            <a:r>
-              <a:rPr sz="1700" b="1" i="0">
-                <a:solidFill>
-                  <a:srgbClr val="F5F0E8"/>
-                </a:solidFill>
-              </a:rPr>
-              <a:t>Vectorise</a:t>
-            </a:r>
-          </a:p>
-        </p:txBody>
-      </p:sp>
-      <p:sp>
-        <p:nvSpPr>
-          <p:cNvPr id="17" name="TextBox 16"/>
-          <p:cNvSpPr txBox="1"/>
-          <p:nvPr/>
-        </p:nvSpPr>
-        <p:spPr>
-          <a:xfrm>
-            <a:off x="5038344" y="3063240"/>
-            <a:ext cx="1920239" cy="2560320"/>
-          </a:xfrm>
-          <a:prstGeom prst="rect">
-            <a:avLst/>
-          </a:prstGeom>
-          <a:noFill/>
-        </p:spPr>
-        <p:txBody>
-          <a:bodyPr wrap="square">
-            <a:spAutoFit/>
-          </a:bodyPr>
-          <a:lstStyle/>
-          <a:p>
-            <a:pPr algn="l"/>
-            <a:r>
-              <a:rPr sz="1400" b="0" i="0">
-                <a:solidFill>
-                  <a:srgbClr val="D4C5A9"/>
-                </a:solidFill>
-              </a:rPr>
-              <a:t>TF-IDF on titles + descriptions.
-Converts text into numerical vectors.</a:t>
-            </a:r>
-          </a:p>
-        </p:txBody>
-      </p:sp>
-      <p:sp>
-        <p:nvSpPr>
-          <p:cNvPr id="18" name="Rectangle 17"/>
-          <p:cNvSpPr/>
-          <p:nvPr/>
-        </p:nvSpPr>
-        <p:spPr>
-          <a:xfrm>
-            <a:off x="7141464" y="1920240"/>
-            <a:ext cx="2103120" cy="4114800"/>
-          </a:xfrm>
-          <a:prstGeom prst="rect">
-            <a:avLst/>
-          </a:prstGeom>
-          <a:solidFill>
-            <a:srgbClr val="2E1E10"/>
-          </a:solidFill>
-          <a:ln>
-            <a:noFill/>
-          </a:ln>
-        </p:spPr>
-        <p:style>
-          <a:lnRef idx="1">
-            <a:schemeClr val="accent1"/>
-          </a:lnRef>
-          <a:fillRef idx="3">
-            <a:schemeClr val="accent1"/>
-          </a:fillRef>
-          <a:effectRef idx="2">
-            <a:schemeClr val="accent1"/>
-          </a:effectRef>
-          <a:fontRef idx="minor">
-            <a:schemeClr val="lt1"/>
-          </a:fontRef>
-        </p:style>
-        <p:txBody>
-          <a:bodyPr rtlCol="0" anchor="ctr"/>
-          <a:lstStyle/>
-          <a:p>
-            <a:pPr algn="ctr"/>
-          </a:p>
-        </p:txBody>
-      </p:sp>
-      <p:sp>
-        <p:nvSpPr>
-          <p:cNvPr id="19" name="TextBox 18"/>
-          <p:cNvSpPr txBox="1"/>
-          <p:nvPr/>
-        </p:nvSpPr>
-        <p:spPr>
-          <a:xfrm>
-            <a:off x="7251192" y="2011680"/>
-            <a:ext cx="1920239" cy="502920"/>
-          </a:xfrm>
-          <a:prstGeom prst="rect">
-            <a:avLst/>
-          </a:prstGeom>
-          <a:noFill/>
-        </p:spPr>
-        <p:txBody>
-          <a:bodyPr wrap="square">
-            <a:spAutoFit/>
-          </a:bodyPr>
-          <a:lstStyle/>
-          <a:p>
-            <a:pPr algn="l"/>
-            <a:r>
-              <a:rPr sz="2800" b="1" i="0">
-                <a:solidFill>
-                  <a:srgbClr val="F5D78E"/>
-                </a:solidFill>
-              </a:rPr>
-              <a:t>04</a:t>
-            </a:r>
-          </a:p>
-        </p:txBody>
-      </p:sp>
-      <p:sp>
-        <p:nvSpPr>
-          <p:cNvPr id="20" name="TextBox 19"/>
-          <p:cNvSpPr txBox="1"/>
-          <p:nvPr/>
-        </p:nvSpPr>
-        <p:spPr>
-          <a:xfrm>
-            <a:off x="7251192" y="2514600"/>
-            <a:ext cx="1920239" cy="502920"/>
-          </a:xfrm>
-          <a:prstGeom prst="rect">
-            <a:avLst/>
-          </a:prstGeom>
-          <a:noFill/>
-        </p:spPr>
-        <p:txBody>
-          <a:bodyPr wrap="square">
-            <a:spAutoFit/>
-          </a:bodyPr>
-          <a:lstStyle/>
-          <a:p>
-            <a:pPr algn="l"/>
-            <a:r>
-              <a:rPr sz="1700" b="1" i="0">
-                <a:solidFill>
-                  <a:srgbClr val="F5F0E8"/>
-                </a:solidFill>
-              </a:rPr>
-              <a:t>Match</a:t>
-            </a:r>
-          </a:p>
-        </p:txBody>
-      </p:sp>
-      <p:sp>
-        <p:nvSpPr>
-          <p:cNvPr id="21" name="TextBox 20"/>
-          <p:cNvSpPr txBox="1"/>
-          <p:nvPr/>
-        </p:nvSpPr>
-        <p:spPr>
-          <a:xfrm>
-            <a:off x="7251192" y="3063240"/>
-            <a:ext cx="1920239" cy="2560320"/>
-          </a:xfrm>
-          <a:prstGeom prst="rect">
-            <a:avLst/>
-          </a:prstGeom>
-          <a:noFill/>
-        </p:spPr>
-        <p:txBody>
-          <a:bodyPr wrap="square">
-            <a:spAutoFit/>
-          </a:bodyPr>
-          <a:lstStyle/>
-          <a:p>
-            <a:pPr algn="l"/>
-            <a:r>
-              <a:rPr sz="1400" b="0" i="0">
-                <a:solidFill>
-                  <a:srgbClr val="D4C5A9"/>
-                </a:solidFill>
-              </a:rPr>
-              <a:t>Cosine similarity between query vector
-and every book in the index.</a:t>
-            </a:r>
-          </a:p>
-        </p:txBody>
-      </p:sp>
-      <p:sp>
-        <p:nvSpPr>
-          <p:cNvPr id="22" name="Rectangle 21"/>
-          <p:cNvSpPr/>
-          <p:nvPr/>
-        </p:nvSpPr>
-        <p:spPr>
-          <a:xfrm>
-            <a:off x="9354312" y="1920240"/>
-            <a:ext cx="2103120" cy="4114800"/>
-          </a:xfrm>
-          <a:prstGeom prst="rect">
-            <a:avLst/>
-          </a:prstGeom>
-          <a:solidFill>
-            <a:srgbClr val="2E1E10"/>
-          </a:solidFill>
-          <a:ln>
-            <a:noFill/>
-          </a:ln>
-        </p:spPr>
-        <p:style>
-          <a:lnRef idx="1">
-            <a:schemeClr val="accent1"/>
-          </a:lnRef>
-          <a:fillRef idx="3">
-            <a:schemeClr val="accent1"/>
-          </a:fillRef>
-          <a:effectRef idx="2">
-            <a:schemeClr val="accent1"/>
-          </a:effectRef>
-          <a:fontRef idx="minor">
-            <a:schemeClr val="lt1"/>
-          </a:fontRef>
-        </p:style>
-        <p:txBody>
-          <a:bodyPr rtlCol="0" anchor="ctr"/>
-          <a:lstStyle/>
-          <a:p>
-            <a:pPr algn="ctr"/>
-          </a:p>
-        </p:txBody>
-      </p:sp>
-      <p:sp>
-        <p:nvSpPr>
-          <p:cNvPr id="23" name="TextBox 22"/>
-          <p:cNvSpPr txBox="1"/>
-          <p:nvPr/>
-        </p:nvSpPr>
-        <p:spPr>
-          <a:xfrm>
-            <a:off x="9464040" y="2011680"/>
-            <a:ext cx="1920239" cy="502920"/>
-          </a:xfrm>
-          <a:prstGeom prst="rect">
-            <a:avLst/>
-          </a:prstGeom>
-          <a:noFill/>
-        </p:spPr>
-        <p:txBody>
-          <a:bodyPr wrap="square">
-            <a:spAutoFit/>
-          </a:bodyPr>
-          <a:lstStyle/>
-          <a:p>
-            <a:pPr algn="l"/>
-            <a:r>
-              <a:rPr sz="2800" b="1" i="0">
-                <a:solidFill>
-                  <a:srgbClr val="F5D78E"/>
-                </a:solidFill>
-              </a:rPr>
-              <a:t>05</a:t>
-            </a:r>
-          </a:p>
-        </p:txBody>
-      </p:sp>
-      <p:sp>
-        <p:nvSpPr>
-          <p:cNvPr id="24" name="TextBox 23"/>
-          <p:cNvSpPr txBox="1"/>
-          <p:nvPr/>
-        </p:nvSpPr>
-        <p:spPr>
-          <a:xfrm>
-            <a:off x="9464040" y="2514600"/>
-            <a:ext cx="1920239" cy="502920"/>
-          </a:xfrm>
-          <a:prstGeom prst="rect">
-            <a:avLst/>
-          </a:prstGeom>
-          <a:noFill/>
-        </p:spPr>
-        <p:txBody>
-          <a:bodyPr wrap="square">
-            <a:spAutoFit/>
-          </a:bodyPr>
-          <a:lstStyle/>
-          <a:p>
-            <a:pPr algn="l"/>
-            <a:r>
-              <a:rPr sz="1700" b="1" i="0">
-                <a:solidFill>
-                  <a:srgbClr val="F5F0E8"/>
-                </a:solidFill>
-              </a:rPr>
-              <a:t>Serve</a:t>
-            </a:r>
-          </a:p>
-        </p:txBody>
-      </p:sp>
-      <p:sp>
-        <p:nvSpPr>
-          <p:cNvPr id="25" name="TextBox 24"/>
-          <p:cNvSpPr txBox="1"/>
-          <p:nvPr/>
-        </p:nvSpPr>
-        <p:spPr>
-          <a:xfrm>
-            <a:off x="9464040" y="3063240"/>
-            <a:ext cx="1920239" cy="2560320"/>
-          </a:xfrm>
-          <a:prstGeom prst="rect">
-            <a:avLst/>
-          </a:prstGeom>
-          <a:noFill/>
-        </p:spPr>
-        <p:txBody>
-          <a:bodyPr wrap="square">
-            <a:spAutoFit/>
-          </a:bodyPr>
-          <a:lstStyle/>
-          <a:p>
-            <a:pPr algn="l"/>
-            <a:r>
-              <a:rPr sz="1400" b="0" i="0">
-                <a:solidFill>
-                  <a:srgbClr val="D4C5A9"/>
-                </a:solidFill>
-              </a:rPr>
-              <a:t>Top-N results ranked by similarity,
-deployed as a Streamlit web app.</a:t>
-            </a:r>
-          </a:p>
-        </p:txBody>
-      </p:sp>
-      <p:sp>
-        <p:nvSpPr>
-          <p:cNvPr id="26" name="TextBox 25"/>
-          <p:cNvSpPr txBox="1"/>
-          <p:nvPr/>
-        </p:nvSpPr>
-        <p:spPr>
-          <a:xfrm>
-            <a:off x="11155680" y="6492240"/>
-            <a:ext cx="914400" cy="320040"/>
-          </a:xfrm>
-          <a:prstGeom prst="rect">
-            <a:avLst/>
-          </a:prstGeom>
-          <a:noFill/>
-        </p:spPr>
-        <p:txBody>
-          <a:bodyPr wrap="square">
-            <a:spAutoFit/>
-          </a:bodyPr>
-          <a:lstStyle/>
-          <a:p>
-            <a:pPr algn="r"/>
-            <a:r>
-              <a:rPr sz="1100" b="0" i="0">
-                <a:solidFill>
-                  <a:srgbClr val="D4C5A9"/>
-                </a:solidFill>
-              </a:rPr>
-              <a:t>3 / 7</a:t>
+              <a:t>3 / 8</a:t>
             </a:r>
           </a:p>
         </p:txBody>
@@ -4879,7 +4440,7 @@
                   <a:srgbClr val="F5D78E"/>
                 </a:solidFill>
               </a:rPr>
-              <a:t>THE METHODOLOGY</a:t>
+              <a:t>THE METHOD</a:t>
             </a:r>
           </a:p>
         </p:txBody>
@@ -4913,229 +4474,27 @@
                   <a:srgbClr val="F5F0E8"/>
                 </a:solidFill>
               </a:rPr>
-              <a:t>Why content-based filtering?</a:t>
-            </a:r>
-          </a:p>
-        </p:txBody>
-      </p:sp>
-      <p:sp>
-        <p:nvSpPr>
-          <p:cNvPr id="6" name="TextBox 5"/>
-          <p:cNvSpPr txBox="1"/>
-          <p:nvPr/>
-        </p:nvSpPr>
-        <p:spPr>
-          <a:xfrm>
-            <a:off x="640080" y="1600200"/>
-            <a:ext cx="5303520" cy="457200"/>
-          </a:xfrm>
-          <a:prstGeom prst="rect">
-            <a:avLst/>
-          </a:prstGeom>
-          <a:noFill/>
-        </p:spPr>
-        <p:txBody>
-          <a:bodyPr wrap="square">
-            <a:spAutoFit/>
-          </a:bodyPr>
-          <a:lstStyle/>
-          <a:p>
-            <a:pPr algn="l"/>
-            <a:r>
-              <a:rPr sz="1700" b="1" i="0">
-                <a:solidFill>
-                  <a:srgbClr val="F5D78E"/>
-                </a:solidFill>
-              </a:rPr>
-              <a:t>The approach</a:t>
-            </a:r>
-          </a:p>
-        </p:txBody>
-      </p:sp>
-      <p:sp>
-        <p:nvSpPr>
-          <p:cNvPr id="7" name="TextBox 6"/>
-          <p:cNvSpPr txBox="1"/>
-          <p:nvPr/>
-        </p:nvSpPr>
-        <p:spPr>
-          <a:xfrm>
-            <a:off x="640080" y="2011680"/>
-            <a:ext cx="5303520" cy="3657600"/>
-          </a:xfrm>
-          <a:prstGeom prst="rect">
-            <a:avLst/>
-          </a:prstGeom>
-          <a:noFill/>
-        </p:spPr>
-        <p:txBody>
-          <a:bodyPr wrap="square">
-            <a:spAutoFit/>
-          </a:bodyPr>
-          <a:lstStyle/>
-          <a:p>
-            <a:pPr algn="l"/>
-            <a:r>
-              <a:rPr sz="1700">
-                <a:solidFill>
-                  <a:srgbClr val="F5F0E8"/>
-                </a:solidFill>
-              </a:rPr>
-              <a:t>  •  Content-based filtering — recommends based on what a book is about, not on what other users clicked.</a:t>
-            </a:r>
-          </a:p>
-          <a:p>
-            <a:pPr algn="l"/>
-            <a:r>
-              <a:rPr sz="1700">
-                <a:solidFill>
-                  <a:srgbClr val="F5F0E8"/>
-                </a:solidFill>
-              </a:rPr>
-              <a:t>  •  Each book is turned into a vector of weighted terms (TF-IDF). The query is vectorised the same way.</a:t>
-            </a:r>
-          </a:p>
-          <a:p>
-            <a:pPr algn="l"/>
-            <a:r>
-              <a:rPr sz="1700">
-                <a:solidFill>
-                  <a:srgbClr val="F5F0E8"/>
-                </a:solidFill>
-              </a:rPr>
-              <a:t>  •  Cosine similarity measures the angle between vectors — it captures topical overlap regardless of book length.</a:t>
-            </a:r>
-          </a:p>
-          <a:p>
-            <a:pPr algn="l"/>
-            <a:r>
-              <a:rPr sz="1700">
-                <a:solidFill>
-                  <a:srgbClr val="F5F0E8"/>
-                </a:solidFill>
-              </a:rPr>
-              <a:t>  •  Returns the top-N closest books in the vector space.</a:t>
-            </a:r>
-          </a:p>
-        </p:txBody>
-      </p:sp>
-      <p:sp>
-        <p:nvSpPr>
-          <p:cNvPr id="8" name="TextBox 7"/>
-          <p:cNvSpPr txBox="1"/>
-          <p:nvPr/>
-        </p:nvSpPr>
-        <p:spPr>
-          <a:xfrm>
-            <a:off x="6217920" y="1600200"/>
-            <a:ext cx="5486400" cy="457200"/>
-          </a:xfrm>
-          <a:prstGeom prst="rect">
-            <a:avLst/>
-          </a:prstGeom>
-          <a:noFill/>
-        </p:spPr>
-        <p:txBody>
-          <a:bodyPr wrap="square">
-            <a:spAutoFit/>
-          </a:bodyPr>
-          <a:lstStyle/>
-          <a:p>
-            <a:pPr algn="l"/>
-            <a:r>
-              <a:rPr sz="1700" b="1" i="0">
-                <a:solidFill>
-                  <a:srgbClr val="F5D78E"/>
-                </a:solidFill>
-              </a:rPr>
-              <a:t>Why not collaborative filtering?</a:t>
-            </a:r>
-          </a:p>
-        </p:txBody>
-      </p:sp>
-      <p:sp>
-        <p:nvSpPr>
-          <p:cNvPr id="9" name="TextBox 8"/>
-          <p:cNvSpPr txBox="1"/>
-          <p:nvPr/>
-        </p:nvSpPr>
-        <p:spPr>
-          <a:xfrm>
-            <a:off x="6217920" y="2011680"/>
-            <a:ext cx="5486400" cy="3657600"/>
-          </a:xfrm>
-          <a:prstGeom prst="rect">
-            <a:avLst/>
-          </a:prstGeom>
-          <a:noFill/>
-        </p:spPr>
-        <p:txBody>
-          <a:bodyPr wrap="square">
-            <a:spAutoFit/>
-          </a:bodyPr>
-          <a:lstStyle/>
-          <a:p>
-            <a:pPr algn="l"/>
-            <a:r>
-              <a:rPr sz="1700">
-                <a:solidFill>
-                  <a:srgbClr val="F5F0E8"/>
-                </a:solidFill>
-              </a:rPr>
-              <a:t>  •  Collaborative filtering needs user ratings and interaction history — we have neither.</a:t>
-            </a:r>
-          </a:p>
-          <a:p>
-            <a:pPr algn="l"/>
-            <a:r>
-              <a:rPr sz="1700">
-                <a:solidFill>
-                  <a:srgbClr val="F5F0E8"/>
-                </a:solidFill>
-              </a:rPr>
-              <a:t>  •  This niche is too small for meaningful user-behaviour data.</a:t>
-            </a:r>
-          </a:p>
-          <a:p>
-            <a:pPr algn="l"/>
-            <a:r>
-              <a:rPr sz="1700">
-                <a:solidFill>
-                  <a:srgbClr val="F5F0E8"/>
-                </a:solidFill>
-              </a:rPr>
-              <a:t>  •  TF-IDF is interpretable: you can see exactly which terms drove a recommendation.</a:t>
-            </a:r>
-          </a:p>
-          <a:p>
-            <a:pPr algn="l"/>
-            <a:r>
-              <a:rPr sz="1700">
-                <a:solidFill>
-                  <a:srgbClr val="F5F0E8"/>
-                </a:solidFill>
-              </a:rPr>
-              <a:t>  •  EDA used KMeans clustering (k=5) + PCA to validate that the books naturally group into coherent topic clusters — confirming the vector space is meaningful.</a:t>
-            </a:r>
-          </a:p>
-        </p:txBody>
-      </p:sp>
-      <p:sp>
-        <p:nvSpPr>
-          <p:cNvPr id="10" name="Rectangle 9"/>
+              <a:t>How the recommender works</a:t>
+            </a:r>
+          </a:p>
+        </p:txBody>
+      </p:sp>
+      <p:sp>
+        <p:nvSpPr>
+          <p:cNvPr id="6" name="Rectangle 5"/>
           <p:cNvSpPr/>
           <p:nvPr/>
         </p:nvSpPr>
         <p:spPr>
           <a:xfrm>
-            <a:off x="5943600" y="1554480"/>
-            <a:ext cx="36576" cy="4572000"/>
+            <a:off x="502920" y="1920240"/>
+            <a:ext cx="2103120" cy="4114800"/>
           </a:xfrm>
           <a:prstGeom prst="rect">
             <a:avLst/>
           </a:prstGeom>
           <a:solidFill>
-            <a:srgbClr val="5C4208"/>
+            <a:srgbClr val="2E1E10"/>
           </a:solidFill>
           <a:ln>
             <a:noFill/>
@@ -5165,14 +4524,14 @@
       </p:sp>
       <p:sp>
         <p:nvSpPr>
-          <p:cNvPr id="11" name="TextBox 10"/>
+          <p:cNvPr id="7" name="TextBox 6"/>
           <p:cNvSpPr txBox="1"/>
           <p:nvPr/>
         </p:nvSpPr>
         <p:spPr>
           <a:xfrm>
-            <a:off x="11155680" y="6492240"/>
-            <a:ext cx="914400" cy="320040"/>
+            <a:off x="612648" y="2011680"/>
+            <a:ext cx="1920239" cy="502920"/>
           </a:xfrm>
           <a:prstGeom prst="rect">
             <a:avLst/>
@@ -5185,6 +4544,693 @@
           </a:bodyPr>
           <a:lstStyle/>
           <a:p>
+            <a:pPr algn="l"/>
+            <a:r>
+              <a:rPr sz="2800" b="1" i="0">
+                <a:solidFill>
+                  <a:srgbClr val="F5D78E"/>
+                </a:solidFill>
+              </a:rPr>
+              <a:t>01</a:t>
+            </a:r>
+          </a:p>
+        </p:txBody>
+      </p:sp>
+      <p:sp>
+        <p:nvSpPr>
+          <p:cNvPr id="8" name="TextBox 7"/>
+          <p:cNvSpPr txBox="1"/>
+          <p:nvPr/>
+        </p:nvSpPr>
+        <p:spPr>
+          <a:xfrm>
+            <a:off x="612648" y="2514600"/>
+            <a:ext cx="1920239" cy="502920"/>
+          </a:xfrm>
+          <a:prstGeom prst="rect">
+            <a:avLst/>
+          </a:prstGeom>
+          <a:noFill/>
+        </p:spPr>
+        <p:txBody>
+          <a:bodyPr wrap="square">
+            <a:spAutoFit/>
+          </a:bodyPr>
+          <a:lstStyle/>
+          <a:p>
+            <a:pPr algn="l"/>
+            <a:r>
+              <a:rPr sz="1700" b="1" i="0">
+                <a:solidFill>
+                  <a:srgbClr val="F5F0E8"/>
+                </a:solidFill>
+              </a:rPr>
+              <a:t>Collect</a:t>
+            </a:r>
+          </a:p>
+        </p:txBody>
+      </p:sp>
+      <p:sp>
+        <p:nvSpPr>
+          <p:cNvPr id="9" name="TextBox 8"/>
+          <p:cNvSpPr txBox="1"/>
+          <p:nvPr/>
+        </p:nvSpPr>
+        <p:spPr>
+          <a:xfrm>
+            <a:off x="612648" y="3063240"/>
+            <a:ext cx="1920239" cy="2560320"/>
+          </a:xfrm>
+          <a:prstGeom prst="rect">
+            <a:avLst/>
+          </a:prstGeom>
+          <a:noFill/>
+        </p:spPr>
+        <p:txBody>
+          <a:bodyPr wrap="square">
+            <a:spAutoFit/>
+          </a:bodyPr>
+          <a:lstStyle/>
+          <a:p>
+            <a:pPr algn="l"/>
+            <a:r>
+              <a:rPr sz="1400" b="0" i="0">
+                <a:solidFill>
+                  <a:srgbClr val="D4C5A9"/>
+                </a:solidFill>
+              </a:rPr>
+              <a:t>~3,034 books scraped from APIs and the web.
+Titles, authors, descriptions, publication years.</a:t>
+            </a:r>
+          </a:p>
+        </p:txBody>
+      </p:sp>
+      <p:sp>
+        <p:nvSpPr>
+          <p:cNvPr id="10" name="Rectangle 9"/>
+          <p:cNvSpPr/>
+          <p:nvPr/>
+        </p:nvSpPr>
+        <p:spPr>
+          <a:xfrm>
+            <a:off x="2715768" y="1920240"/>
+            <a:ext cx="2103120" cy="4114800"/>
+          </a:xfrm>
+          <a:prstGeom prst="rect">
+            <a:avLst/>
+          </a:prstGeom>
+          <a:solidFill>
+            <a:srgbClr val="2E1E10"/>
+          </a:solidFill>
+          <a:ln>
+            <a:noFill/>
+          </a:ln>
+        </p:spPr>
+        <p:style>
+          <a:lnRef idx="1">
+            <a:schemeClr val="accent1"/>
+          </a:lnRef>
+          <a:fillRef idx="3">
+            <a:schemeClr val="accent1"/>
+          </a:fillRef>
+          <a:effectRef idx="2">
+            <a:schemeClr val="accent1"/>
+          </a:effectRef>
+          <a:fontRef idx="minor">
+            <a:schemeClr val="lt1"/>
+          </a:fontRef>
+        </p:style>
+        <p:txBody>
+          <a:bodyPr rtlCol="0" anchor="ctr"/>
+          <a:lstStyle/>
+          <a:p>
+            <a:pPr algn="ctr"/>
+          </a:p>
+        </p:txBody>
+      </p:sp>
+      <p:sp>
+        <p:nvSpPr>
+          <p:cNvPr id="11" name="TextBox 10"/>
+          <p:cNvSpPr txBox="1"/>
+          <p:nvPr/>
+        </p:nvSpPr>
+        <p:spPr>
+          <a:xfrm>
+            <a:off x="2825496" y="2011680"/>
+            <a:ext cx="1920239" cy="502920"/>
+          </a:xfrm>
+          <a:prstGeom prst="rect">
+            <a:avLst/>
+          </a:prstGeom>
+          <a:noFill/>
+        </p:spPr>
+        <p:txBody>
+          <a:bodyPr wrap="square">
+            <a:spAutoFit/>
+          </a:bodyPr>
+          <a:lstStyle/>
+          <a:p>
+            <a:pPr algn="l"/>
+            <a:r>
+              <a:rPr sz="2800" b="1" i="0">
+                <a:solidFill>
+                  <a:srgbClr val="F5D78E"/>
+                </a:solidFill>
+              </a:rPr>
+              <a:t>02</a:t>
+            </a:r>
+          </a:p>
+        </p:txBody>
+      </p:sp>
+      <p:sp>
+        <p:nvSpPr>
+          <p:cNvPr id="12" name="TextBox 11"/>
+          <p:cNvSpPr txBox="1"/>
+          <p:nvPr/>
+        </p:nvSpPr>
+        <p:spPr>
+          <a:xfrm>
+            <a:off x="2825496" y="2514600"/>
+            <a:ext cx="1920239" cy="502920"/>
+          </a:xfrm>
+          <a:prstGeom prst="rect">
+            <a:avLst/>
+          </a:prstGeom>
+          <a:noFill/>
+        </p:spPr>
+        <p:txBody>
+          <a:bodyPr wrap="square">
+            <a:spAutoFit/>
+          </a:bodyPr>
+          <a:lstStyle/>
+          <a:p>
+            <a:pPr algn="l"/>
+            <a:r>
+              <a:rPr sz="1700" b="1" i="0">
+                <a:solidFill>
+                  <a:srgbClr val="F5F0E8"/>
+                </a:solidFill>
+              </a:rPr>
+              <a:t>Clean</a:t>
+            </a:r>
+          </a:p>
+        </p:txBody>
+      </p:sp>
+      <p:sp>
+        <p:nvSpPr>
+          <p:cNvPr id="13" name="TextBox 12"/>
+          <p:cNvSpPr txBox="1"/>
+          <p:nvPr/>
+        </p:nvSpPr>
+        <p:spPr>
+          <a:xfrm>
+            <a:off x="2825496" y="3063240"/>
+            <a:ext cx="1920239" cy="2560320"/>
+          </a:xfrm>
+          <a:prstGeom prst="rect">
+            <a:avLst/>
+          </a:prstGeom>
+          <a:noFill/>
+        </p:spPr>
+        <p:txBody>
+          <a:bodyPr wrap="square">
+            <a:spAutoFit/>
+          </a:bodyPr>
+          <a:lstStyle/>
+          <a:p>
+            <a:pPr algn="l"/>
+            <a:r>
+              <a:rPr sz="1400" b="0" i="0">
+                <a:solidFill>
+                  <a:srgbClr val="D4C5A9"/>
+                </a:solidFill>
+              </a:rPr>
+              <a:t>Deduplication, missing-value handling,
+normalising formats across sources.</a:t>
+            </a:r>
+          </a:p>
+        </p:txBody>
+      </p:sp>
+      <p:sp>
+        <p:nvSpPr>
+          <p:cNvPr id="14" name="Rectangle 13"/>
+          <p:cNvSpPr/>
+          <p:nvPr/>
+        </p:nvSpPr>
+        <p:spPr>
+          <a:xfrm>
+            <a:off x="4928616" y="1920240"/>
+            <a:ext cx="2103120" cy="4114800"/>
+          </a:xfrm>
+          <a:prstGeom prst="rect">
+            <a:avLst/>
+          </a:prstGeom>
+          <a:solidFill>
+            <a:srgbClr val="2E1E10"/>
+          </a:solidFill>
+          <a:ln>
+            <a:noFill/>
+          </a:ln>
+        </p:spPr>
+        <p:style>
+          <a:lnRef idx="1">
+            <a:schemeClr val="accent1"/>
+          </a:lnRef>
+          <a:fillRef idx="3">
+            <a:schemeClr val="accent1"/>
+          </a:fillRef>
+          <a:effectRef idx="2">
+            <a:schemeClr val="accent1"/>
+          </a:effectRef>
+          <a:fontRef idx="minor">
+            <a:schemeClr val="lt1"/>
+          </a:fontRef>
+        </p:style>
+        <p:txBody>
+          <a:bodyPr rtlCol="0" anchor="ctr"/>
+          <a:lstStyle/>
+          <a:p>
+            <a:pPr algn="ctr"/>
+          </a:p>
+        </p:txBody>
+      </p:sp>
+      <p:sp>
+        <p:nvSpPr>
+          <p:cNvPr id="15" name="TextBox 14"/>
+          <p:cNvSpPr txBox="1"/>
+          <p:nvPr/>
+        </p:nvSpPr>
+        <p:spPr>
+          <a:xfrm>
+            <a:off x="5038344" y="2011680"/>
+            <a:ext cx="1920239" cy="502920"/>
+          </a:xfrm>
+          <a:prstGeom prst="rect">
+            <a:avLst/>
+          </a:prstGeom>
+          <a:noFill/>
+        </p:spPr>
+        <p:txBody>
+          <a:bodyPr wrap="square">
+            <a:spAutoFit/>
+          </a:bodyPr>
+          <a:lstStyle/>
+          <a:p>
+            <a:pPr algn="l"/>
+            <a:r>
+              <a:rPr sz="2800" b="1" i="0">
+                <a:solidFill>
+                  <a:srgbClr val="F5D78E"/>
+                </a:solidFill>
+              </a:rPr>
+              <a:t>03</a:t>
+            </a:r>
+          </a:p>
+        </p:txBody>
+      </p:sp>
+      <p:sp>
+        <p:nvSpPr>
+          <p:cNvPr id="16" name="TextBox 15"/>
+          <p:cNvSpPr txBox="1"/>
+          <p:nvPr/>
+        </p:nvSpPr>
+        <p:spPr>
+          <a:xfrm>
+            <a:off x="5038344" y="2514600"/>
+            <a:ext cx="1920239" cy="502920"/>
+          </a:xfrm>
+          <a:prstGeom prst="rect">
+            <a:avLst/>
+          </a:prstGeom>
+          <a:noFill/>
+        </p:spPr>
+        <p:txBody>
+          <a:bodyPr wrap="square">
+            <a:spAutoFit/>
+          </a:bodyPr>
+          <a:lstStyle/>
+          <a:p>
+            <a:pPr algn="l"/>
+            <a:r>
+              <a:rPr sz="1700" b="1" i="0">
+                <a:solidFill>
+                  <a:srgbClr val="F5F0E8"/>
+                </a:solidFill>
+              </a:rPr>
+              <a:t>Vectorise</a:t>
+            </a:r>
+          </a:p>
+        </p:txBody>
+      </p:sp>
+      <p:sp>
+        <p:nvSpPr>
+          <p:cNvPr id="17" name="TextBox 16"/>
+          <p:cNvSpPr txBox="1"/>
+          <p:nvPr/>
+        </p:nvSpPr>
+        <p:spPr>
+          <a:xfrm>
+            <a:off x="5038344" y="3063240"/>
+            <a:ext cx="1920239" cy="2560320"/>
+          </a:xfrm>
+          <a:prstGeom prst="rect">
+            <a:avLst/>
+          </a:prstGeom>
+          <a:noFill/>
+        </p:spPr>
+        <p:txBody>
+          <a:bodyPr wrap="square">
+            <a:spAutoFit/>
+          </a:bodyPr>
+          <a:lstStyle/>
+          <a:p>
+            <a:pPr algn="l"/>
+            <a:r>
+              <a:rPr sz="1400" b="0" i="0">
+                <a:solidFill>
+                  <a:srgbClr val="D4C5A9"/>
+                </a:solidFill>
+              </a:rPr>
+              <a:t>TF-IDF on titles + descriptions.
+Converts text into numerical vectors.</a:t>
+            </a:r>
+          </a:p>
+        </p:txBody>
+      </p:sp>
+      <p:sp>
+        <p:nvSpPr>
+          <p:cNvPr id="18" name="Rectangle 17"/>
+          <p:cNvSpPr/>
+          <p:nvPr/>
+        </p:nvSpPr>
+        <p:spPr>
+          <a:xfrm>
+            <a:off x="7141464" y="1920240"/>
+            <a:ext cx="2103120" cy="4114800"/>
+          </a:xfrm>
+          <a:prstGeom prst="rect">
+            <a:avLst/>
+          </a:prstGeom>
+          <a:solidFill>
+            <a:srgbClr val="2E1E10"/>
+          </a:solidFill>
+          <a:ln>
+            <a:noFill/>
+          </a:ln>
+        </p:spPr>
+        <p:style>
+          <a:lnRef idx="1">
+            <a:schemeClr val="accent1"/>
+          </a:lnRef>
+          <a:fillRef idx="3">
+            <a:schemeClr val="accent1"/>
+          </a:fillRef>
+          <a:effectRef idx="2">
+            <a:schemeClr val="accent1"/>
+          </a:effectRef>
+          <a:fontRef idx="minor">
+            <a:schemeClr val="lt1"/>
+          </a:fontRef>
+        </p:style>
+        <p:txBody>
+          <a:bodyPr rtlCol="0" anchor="ctr"/>
+          <a:lstStyle/>
+          <a:p>
+            <a:pPr algn="ctr"/>
+          </a:p>
+        </p:txBody>
+      </p:sp>
+      <p:sp>
+        <p:nvSpPr>
+          <p:cNvPr id="19" name="TextBox 18"/>
+          <p:cNvSpPr txBox="1"/>
+          <p:nvPr/>
+        </p:nvSpPr>
+        <p:spPr>
+          <a:xfrm>
+            <a:off x="7251192" y="2011680"/>
+            <a:ext cx="1920239" cy="502920"/>
+          </a:xfrm>
+          <a:prstGeom prst="rect">
+            <a:avLst/>
+          </a:prstGeom>
+          <a:noFill/>
+        </p:spPr>
+        <p:txBody>
+          <a:bodyPr wrap="square">
+            <a:spAutoFit/>
+          </a:bodyPr>
+          <a:lstStyle/>
+          <a:p>
+            <a:pPr algn="l"/>
+            <a:r>
+              <a:rPr sz="2800" b="1" i="0">
+                <a:solidFill>
+                  <a:srgbClr val="F5D78E"/>
+                </a:solidFill>
+              </a:rPr>
+              <a:t>04</a:t>
+            </a:r>
+          </a:p>
+        </p:txBody>
+      </p:sp>
+      <p:sp>
+        <p:nvSpPr>
+          <p:cNvPr id="20" name="TextBox 19"/>
+          <p:cNvSpPr txBox="1"/>
+          <p:nvPr/>
+        </p:nvSpPr>
+        <p:spPr>
+          <a:xfrm>
+            <a:off x="7251192" y="2514600"/>
+            <a:ext cx="1920239" cy="502920"/>
+          </a:xfrm>
+          <a:prstGeom prst="rect">
+            <a:avLst/>
+          </a:prstGeom>
+          <a:noFill/>
+        </p:spPr>
+        <p:txBody>
+          <a:bodyPr wrap="square">
+            <a:spAutoFit/>
+          </a:bodyPr>
+          <a:lstStyle/>
+          <a:p>
+            <a:pPr algn="l"/>
+            <a:r>
+              <a:rPr sz="1700" b="1" i="0">
+                <a:solidFill>
+                  <a:srgbClr val="F5F0E8"/>
+                </a:solidFill>
+              </a:rPr>
+              <a:t>Match</a:t>
+            </a:r>
+          </a:p>
+        </p:txBody>
+      </p:sp>
+      <p:sp>
+        <p:nvSpPr>
+          <p:cNvPr id="21" name="TextBox 20"/>
+          <p:cNvSpPr txBox="1"/>
+          <p:nvPr/>
+        </p:nvSpPr>
+        <p:spPr>
+          <a:xfrm>
+            <a:off x="7251192" y="3063240"/>
+            <a:ext cx="1920239" cy="2560320"/>
+          </a:xfrm>
+          <a:prstGeom prst="rect">
+            <a:avLst/>
+          </a:prstGeom>
+          <a:noFill/>
+        </p:spPr>
+        <p:txBody>
+          <a:bodyPr wrap="square">
+            <a:spAutoFit/>
+          </a:bodyPr>
+          <a:lstStyle/>
+          <a:p>
+            <a:pPr algn="l"/>
+            <a:r>
+              <a:rPr sz="1400" b="0" i="0">
+                <a:solidFill>
+                  <a:srgbClr val="D4C5A9"/>
+                </a:solidFill>
+              </a:rPr>
+              <a:t>Cosine similarity between query vector
+and every book in the index.</a:t>
+            </a:r>
+          </a:p>
+        </p:txBody>
+      </p:sp>
+      <p:sp>
+        <p:nvSpPr>
+          <p:cNvPr id="22" name="Rectangle 21"/>
+          <p:cNvSpPr/>
+          <p:nvPr/>
+        </p:nvSpPr>
+        <p:spPr>
+          <a:xfrm>
+            <a:off x="9354312" y="1920240"/>
+            <a:ext cx="2103120" cy="4114800"/>
+          </a:xfrm>
+          <a:prstGeom prst="rect">
+            <a:avLst/>
+          </a:prstGeom>
+          <a:solidFill>
+            <a:srgbClr val="2E1E10"/>
+          </a:solidFill>
+          <a:ln>
+            <a:noFill/>
+          </a:ln>
+        </p:spPr>
+        <p:style>
+          <a:lnRef idx="1">
+            <a:schemeClr val="accent1"/>
+          </a:lnRef>
+          <a:fillRef idx="3">
+            <a:schemeClr val="accent1"/>
+          </a:fillRef>
+          <a:effectRef idx="2">
+            <a:schemeClr val="accent1"/>
+          </a:effectRef>
+          <a:fontRef idx="minor">
+            <a:schemeClr val="lt1"/>
+          </a:fontRef>
+        </p:style>
+        <p:txBody>
+          <a:bodyPr rtlCol="0" anchor="ctr"/>
+          <a:lstStyle/>
+          <a:p>
+            <a:pPr algn="ctr"/>
+          </a:p>
+        </p:txBody>
+      </p:sp>
+      <p:sp>
+        <p:nvSpPr>
+          <p:cNvPr id="23" name="TextBox 22"/>
+          <p:cNvSpPr txBox="1"/>
+          <p:nvPr/>
+        </p:nvSpPr>
+        <p:spPr>
+          <a:xfrm>
+            <a:off x="9464040" y="2011680"/>
+            <a:ext cx="1920239" cy="502920"/>
+          </a:xfrm>
+          <a:prstGeom prst="rect">
+            <a:avLst/>
+          </a:prstGeom>
+          <a:noFill/>
+        </p:spPr>
+        <p:txBody>
+          <a:bodyPr wrap="square">
+            <a:spAutoFit/>
+          </a:bodyPr>
+          <a:lstStyle/>
+          <a:p>
+            <a:pPr algn="l"/>
+            <a:r>
+              <a:rPr sz="2800" b="1" i="0">
+                <a:solidFill>
+                  <a:srgbClr val="F5D78E"/>
+                </a:solidFill>
+              </a:rPr>
+              <a:t>05</a:t>
+            </a:r>
+          </a:p>
+        </p:txBody>
+      </p:sp>
+      <p:sp>
+        <p:nvSpPr>
+          <p:cNvPr id="24" name="TextBox 23"/>
+          <p:cNvSpPr txBox="1"/>
+          <p:nvPr/>
+        </p:nvSpPr>
+        <p:spPr>
+          <a:xfrm>
+            <a:off x="9464040" y="2514600"/>
+            <a:ext cx="1920239" cy="502920"/>
+          </a:xfrm>
+          <a:prstGeom prst="rect">
+            <a:avLst/>
+          </a:prstGeom>
+          <a:noFill/>
+        </p:spPr>
+        <p:txBody>
+          <a:bodyPr wrap="square">
+            <a:spAutoFit/>
+          </a:bodyPr>
+          <a:lstStyle/>
+          <a:p>
+            <a:pPr algn="l"/>
+            <a:r>
+              <a:rPr sz="1700" b="1" i="0">
+                <a:solidFill>
+                  <a:srgbClr val="F5F0E8"/>
+                </a:solidFill>
+              </a:rPr>
+              <a:t>Serve</a:t>
+            </a:r>
+          </a:p>
+        </p:txBody>
+      </p:sp>
+      <p:sp>
+        <p:nvSpPr>
+          <p:cNvPr id="25" name="TextBox 24"/>
+          <p:cNvSpPr txBox="1"/>
+          <p:nvPr/>
+        </p:nvSpPr>
+        <p:spPr>
+          <a:xfrm>
+            <a:off x="9464040" y="3063240"/>
+            <a:ext cx="1920239" cy="2560320"/>
+          </a:xfrm>
+          <a:prstGeom prst="rect">
+            <a:avLst/>
+          </a:prstGeom>
+          <a:noFill/>
+        </p:spPr>
+        <p:txBody>
+          <a:bodyPr wrap="square">
+            <a:spAutoFit/>
+          </a:bodyPr>
+          <a:lstStyle/>
+          <a:p>
+            <a:pPr algn="l"/>
+            <a:r>
+              <a:rPr sz="1400" b="0" i="0">
+                <a:solidFill>
+                  <a:srgbClr val="D4C5A9"/>
+                </a:solidFill>
+              </a:rPr>
+              <a:t>Top-N results ranked by similarity,
+deployed as a Streamlit web app.</a:t>
+            </a:r>
+          </a:p>
+        </p:txBody>
+      </p:sp>
+      <p:sp>
+        <p:nvSpPr>
+          <p:cNvPr id="26" name="TextBox 25"/>
+          <p:cNvSpPr txBox="1"/>
+          <p:nvPr/>
+        </p:nvSpPr>
+        <p:spPr>
+          <a:xfrm>
+            <a:off x="11155680" y="6492240"/>
+            <a:ext cx="914400" cy="320040"/>
+          </a:xfrm>
+          <a:prstGeom prst="rect">
+            <a:avLst/>
+          </a:prstGeom>
+          <a:noFill/>
+        </p:spPr>
+        <p:txBody>
+          <a:bodyPr wrap="square">
+            <a:spAutoFit/>
+          </a:bodyPr>
+          <a:lstStyle/>
+          <a:p>
             <a:pPr algn="r"/>
             <a:r>
               <a:rPr sz="1100" b="0" i="0">
@@ -5192,7 +5238,7 @@
                   <a:srgbClr val="D4C5A9"/>
                 </a:solidFill>
               </a:rPr>
-              <a:t>4 / 7</a:t>
+              <a:t>5 / 8</a:t>
             </a:r>
           </a:p>
         </p:txBody>
@@ -5338,7 +5384,7 @@
                   <a:srgbClr val="F5D78E"/>
                 </a:solidFill>
               </a:rPr>
-              <a:t>THE JOURNEY</a:t>
+              <a:t>THE METHODOLOGY</a:t>
             </a:r>
           </a:p>
         </p:txBody>
@@ -5372,27 +5418,229 @@
                   <a:srgbClr val="F5F0E8"/>
                 </a:solidFill>
               </a:rPr>
-              <a:t>What the process actually looked like</a:t>
-            </a:r>
-          </a:p>
-        </p:txBody>
-      </p:sp>
-      <p:sp>
-        <p:nvSpPr>
-          <p:cNvPr id="6" name="Rectangle 5"/>
+              <a:t>Why content-based filtering?</a:t>
+            </a:r>
+          </a:p>
+        </p:txBody>
+      </p:sp>
+      <p:sp>
+        <p:nvSpPr>
+          <p:cNvPr id="6" name="TextBox 5"/>
+          <p:cNvSpPr txBox="1"/>
+          <p:nvPr/>
+        </p:nvSpPr>
+        <p:spPr>
+          <a:xfrm>
+            <a:off x="640080" y="1600200"/>
+            <a:ext cx="5303520" cy="457200"/>
+          </a:xfrm>
+          <a:prstGeom prst="rect">
+            <a:avLst/>
+          </a:prstGeom>
+          <a:noFill/>
+        </p:spPr>
+        <p:txBody>
+          <a:bodyPr wrap="square">
+            <a:spAutoFit/>
+          </a:bodyPr>
+          <a:lstStyle/>
+          <a:p>
+            <a:pPr algn="l"/>
+            <a:r>
+              <a:rPr sz="1700" b="1" i="0">
+                <a:solidFill>
+                  <a:srgbClr val="F5D78E"/>
+                </a:solidFill>
+              </a:rPr>
+              <a:t>The approach</a:t>
+            </a:r>
+          </a:p>
+        </p:txBody>
+      </p:sp>
+      <p:sp>
+        <p:nvSpPr>
+          <p:cNvPr id="7" name="TextBox 6"/>
+          <p:cNvSpPr txBox="1"/>
+          <p:nvPr/>
+        </p:nvSpPr>
+        <p:spPr>
+          <a:xfrm>
+            <a:off x="640080" y="2011680"/>
+            <a:ext cx="5303520" cy="3657600"/>
+          </a:xfrm>
+          <a:prstGeom prst="rect">
+            <a:avLst/>
+          </a:prstGeom>
+          <a:noFill/>
+        </p:spPr>
+        <p:txBody>
+          <a:bodyPr wrap="square">
+            <a:spAutoFit/>
+          </a:bodyPr>
+          <a:lstStyle/>
+          <a:p>
+            <a:pPr algn="l"/>
+            <a:r>
+              <a:rPr sz="1700">
+                <a:solidFill>
+                  <a:srgbClr val="F5F0E8"/>
+                </a:solidFill>
+              </a:rPr>
+              <a:t>  •  Content-based filtering — recommends based on what a book is about, not on what other users clicked.</a:t>
+            </a:r>
+          </a:p>
+          <a:p>
+            <a:pPr algn="l"/>
+            <a:r>
+              <a:rPr sz="1700">
+                <a:solidFill>
+                  <a:srgbClr val="F5F0E8"/>
+                </a:solidFill>
+              </a:rPr>
+              <a:t>  •  Each book is turned into a vector of weighted terms (TF-IDF). The query is vectorised the same way.</a:t>
+            </a:r>
+          </a:p>
+          <a:p>
+            <a:pPr algn="l"/>
+            <a:r>
+              <a:rPr sz="1700">
+                <a:solidFill>
+                  <a:srgbClr val="F5F0E8"/>
+                </a:solidFill>
+              </a:rPr>
+              <a:t>  •  Cosine similarity measures the angle between vectors — it captures topical overlap regardless of book length.</a:t>
+            </a:r>
+          </a:p>
+          <a:p>
+            <a:pPr algn="l"/>
+            <a:r>
+              <a:rPr sz="1700">
+                <a:solidFill>
+                  <a:srgbClr val="F5F0E8"/>
+                </a:solidFill>
+              </a:rPr>
+              <a:t>  •  Returns the top-N closest books in the vector space.</a:t>
+            </a:r>
+          </a:p>
+        </p:txBody>
+      </p:sp>
+      <p:sp>
+        <p:nvSpPr>
+          <p:cNvPr id="8" name="TextBox 7"/>
+          <p:cNvSpPr txBox="1"/>
+          <p:nvPr/>
+        </p:nvSpPr>
+        <p:spPr>
+          <a:xfrm>
+            <a:off x="6217920" y="1600200"/>
+            <a:ext cx="5486400" cy="457200"/>
+          </a:xfrm>
+          <a:prstGeom prst="rect">
+            <a:avLst/>
+          </a:prstGeom>
+          <a:noFill/>
+        </p:spPr>
+        <p:txBody>
+          <a:bodyPr wrap="square">
+            <a:spAutoFit/>
+          </a:bodyPr>
+          <a:lstStyle/>
+          <a:p>
+            <a:pPr algn="l"/>
+            <a:r>
+              <a:rPr sz="1700" b="1" i="0">
+                <a:solidFill>
+                  <a:srgbClr val="F5D78E"/>
+                </a:solidFill>
+              </a:rPr>
+              <a:t>Why not collaborative filtering?</a:t>
+            </a:r>
+          </a:p>
+        </p:txBody>
+      </p:sp>
+      <p:sp>
+        <p:nvSpPr>
+          <p:cNvPr id="9" name="TextBox 8"/>
+          <p:cNvSpPr txBox="1"/>
+          <p:nvPr/>
+        </p:nvSpPr>
+        <p:spPr>
+          <a:xfrm>
+            <a:off x="6217920" y="2011680"/>
+            <a:ext cx="5486400" cy="3657600"/>
+          </a:xfrm>
+          <a:prstGeom prst="rect">
+            <a:avLst/>
+          </a:prstGeom>
+          <a:noFill/>
+        </p:spPr>
+        <p:txBody>
+          <a:bodyPr wrap="square">
+            <a:spAutoFit/>
+          </a:bodyPr>
+          <a:lstStyle/>
+          <a:p>
+            <a:pPr algn="l"/>
+            <a:r>
+              <a:rPr sz="1700">
+                <a:solidFill>
+                  <a:srgbClr val="F5F0E8"/>
+                </a:solidFill>
+              </a:rPr>
+              <a:t>  •  Collaborative filtering needs user ratings and interaction history — we have neither.</a:t>
+            </a:r>
+          </a:p>
+          <a:p>
+            <a:pPr algn="l"/>
+            <a:r>
+              <a:rPr sz="1700">
+                <a:solidFill>
+                  <a:srgbClr val="F5F0E8"/>
+                </a:solidFill>
+              </a:rPr>
+              <a:t>  •  This niche is too small for meaningful user-behaviour data.</a:t>
+            </a:r>
+          </a:p>
+          <a:p>
+            <a:pPr algn="l"/>
+            <a:r>
+              <a:rPr sz="1700">
+                <a:solidFill>
+                  <a:srgbClr val="F5F0E8"/>
+                </a:solidFill>
+              </a:rPr>
+              <a:t>  •  TF-IDF is interpretable: you can see exactly which terms drove a recommendation.</a:t>
+            </a:r>
+          </a:p>
+          <a:p>
+            <a:pPr algn="l"/>
+            <a:r>
+              <a:rPr sz="1700">
+                <a:solidFill>
+                  <a:srgbClr val="F5F0E8"/>
+                </a:solidFill>
+              </a:rPr>
+              <a:t>  •  EDA used KMeans clustering (k=5) + PCA to validate that the books naturally group into coherent topic clusters — confirming the vector space is meaningful.</a:t>
+            </a:r>
+          </a:p>
+        </p:txBody>
+      </p:sp>
+      <p:sp>
+        <p:nvSpPr>
+          <p:cNvPr id="10" name="Rectangle 9"/>
           <p:cNvSpPr/>
           <p:nvPr/>
         </p:nvSpPr>
         <p:spPr>
           <a:xfrm>
-            <a:off x="640080" y="1965960"/>
-            <a:ext cx="5394960" cy="1920240"/>
+            <a:off x="5943600" y="1554480"/>
+            <a:ext cx="36576" cy="4572000"/>
           </a:xfrm>
           <a:prstGeom prst="rect">
             <a:avLst/>
           </a:prstGeom>
           <a:solidFill>
-            <a:srgbClr val="2E1E10"/>
+            <a:srgbClr val="5C4208"/>
           </a:solidFill>
           <a:ln>
             <a:noFill/>
@@ -5422,14 +5670,14 @@
       </p:sp>
       <p:sp>
         <p:nvSpPr>
-          <p:cNvPr id="7" name="TextBox 6"/>
+          <p:cNvPr id="11" name="TextBox 10"/>
           <p:cNvSpPr txBox="1"/>
           <p:nvPr/>
         </p:nvSpPr>
         <p:spPr>
           <a:xfrm>
-            <a:off x="777240" y="2075688"/>
-            <a:ext cx="5120640" cy="411480"/>
+            <a:off x="11155680" y="6492240"/>
+            <a:ext cx="914400" cy="320040"/>
           </a:xfrm>
           <a:prstGeom prst="rect">
             <a:avLst/>
@@ -5442,451 +5690,6 @@
           </a:bodyPr>
           <a:lstStyle/>
           <a:p>
-            <a:pPr algn="l"/>
-            <a:r>
-              <a:rPr sz="1500" b="1" i="0">
-                <a:solidFill>
-                  <a:srgbClr val="F5D78E"/>
-                </a:solidFill>
-              </a:rPr>
-              <a:t>Data collection</a:t>
-            </a:r>
-          </a:p>
-        </p:txBody>
-      </p:sp>
-      <p:sp>
-        <p:nvSpPr>
-          <p:cNvPr id="8" name="TextBox 7"/>
-          <p:cNvSpPr txBox="1"/>
-          <p:nvPr/>
-        </p:nvSpPr>
-        <p:spPr>
-          <a:xfrm>
-            <a:off x="685800" y="2468880"/>
-            <a:ext cx="5257800" cy="1280160"/>
-          </a:xfrm>
-          <a:prstGeom prst="rect">
-            <a:avLst/>
-          </a:prstGeom>
-          <a:noFill/>
-        </p:spPr>
-        <p:txBody>
-          <a:bodyPr wrap="square">
-            <a:spAutoFit/>
-          </a:bodyPr>
-          <a:lstStyle/>
-          <a:p>
-            <a:pPr algn="l"/>
-            <a:r>
-              <a:rPr sz="1300">
-                <a:solidFill>
-                  <a:srgbClr val="F5F0E8"/>
-                </a:solidFill>
-              </a:rPr>
-              <a:t>  •  Hit API rate limits repeatedly — had to slow down and batch requests.</a:t>
-            </a:r>
-          </a:p>
-          <a:p>
-            <a:pPr algn="l"/>
-            <a:r>
-              <a:rPr sz="1300">
-                <a:solidFill>
-                  <a:srgbClr val="F5F0E8"/>
-                </a:solidFill>
-              </a:rPr>
-              <a:t>  •  Scraped two sources and merged them, with lots of duplicate noise.</a:t>
-            </a:r>
-          </a:p>
-        </p:txBody>
-      </p:sp>
-      <p:sp>
-        <p:nvSpPr>
-          <p:cNvPr id="9" name="Rectangle 8"/>
-          <p:cNvSpPr/>
-          <p:nvPr/>
-        </p:nvSpPr>
-        <p:spPr>
-          <a:xfrm>
-            <a:off x="6400800" y="1965960"/>
-            <a:ext cx="5394960" cy="1920240"/>
-          </a:xfrm>
-          <a:prstGeom prst="rect">
-            <a:avLst/>
-          </a:prstGeom>
-          <a:solidFill>
-            <a:srgbClr val="2E1E10"/>
-          </a:solidFill>
-          <a:ln>
-            <a:noFill/>
-          </a:ln>
-        </p:spPr>
-        <p:style>
-          <a:lnRef idx="1">
-            <a:schemeClr val="accent1"/>
-          </a:lnRef>
-          <a:fillRef idx="3">
-            <a:schemeClr val="accent1"/>
-          </a:fillRef>
-          <a:effectRef idx="2">
-            <a:schemeClr val="accent1"/>
-          </a:effectRef>
-          <a:fontRef idx="minor">
-            <a:schemeClr val="lt1"/>
-          </a:fontRef>
-        </p:style>
-        <p:txBody>
-          <a:bodyPr rtlCol="0" anchor="ctr"/>
-          <a:lstStyle/>
-          <a:p>
-            <a:pPr algn="ctr"/>
-          </a:p>
-        </p:txBody>
-      </p:sp>
-      <p:sp>
-        <p:nvSpPr>
-          <p:cNvPr id="10" name="TextBox 9"/>
-          <p:cNvSpPr txBox="1"/>
-          <p:nvPr/>
-        </p:nvSpPr>
-        <p:spPr>
-          <a:xfrm>
-            <a:off x="6537960" y="2075688"/>
-            <a:ext cx="5120640" cy="411480"/>
-          </a:xfrm>
-          <a:prstGeom prst="rect">
-            <a:avLst/>
-          </a:prstGeom>
-          <a:noFill/>
-        </p:spPr>
-        <p:txBody>
-          <a:bodyPr wrap="square">
-            <a:spAutoFit/>
-          </a:bodyPr>
-          <a:lstStyle/>
-          <a:p>
-            <a:pPr algn="l"/>
-            <a:r>
-              <a:rPr sz="1500" b="1" i="0">
-                <a:solidFill>
-                  <a:srgbClr val="F5D78E"/>
-                </a:solidFill>
-              </a:rPr>
-              <a:t>Data cleaning</a:t>
-            </a:r>
-          </a:p>
-        </p:txBody>
-      </p:sp>
-      <p:sp>
-        <p:nvSpPr>
-          <p:cNvPr id="11" name="TextBox 10"/>
-          <p:cNvSpPr txBox="1"/>
-          <p:nvPr/>
-        </p:nvSpPr>
-        <p:spPr>
-          <a:xfrm>
-            <a:off x="6446520" y="2468880"/>
-            <a:ext cx="5257800" cy="1280160"/>
-          </a:xfrm>
-          <a:prstGeom prst="rect">
-            <a:avLst/>
-          </a:prstGeom>
-          <a:noFill/>
-        </p:spPr>
-        <p:txBody>
-          <a:bodyPr wrap="square">
-            <a:spAutoFit/>
-          </a:bodyPr>
-          <a:lstStyle/>
-          <a:p>
-            <a:pPr algn="l"/>
-            <a:r>
-              <a:rPr sz="1300">
-                <a:solidFill>
-                  <a:srgbClr val="F5F0E8"/>
-                </a:solidFill>
-              </a:rPr>
-              <a:t>  •  Inconsistent author names, missing descriptions, broken years.</a:t>
-            </a:r>
-          </a:p>
-          <a:p>
-            <a:pPr algn="l"/>
-            <a:r>
-              <a:rPr sz="1300">
-                <a:solidFill>
-                  <a:srgbClr val="F5F0E8"/>
-                </a:solidFill>
-              </a:rPr>
-              <a:t>  •  Manually reviewed edge cases — some 'books' were study guides or Wikipedia dumps.</a:t>
-            </a:r>
-          </a:p>
-        </p:txBody>
-      </p:sp>
-      <p:sp>
-        <p:nvSpPr>
-          <p:cNvPr id="12" name="Rectangle 11"/>
-          <p:cNvSpPr/>
-          <p:nvPr/>
-        </p:nvSpPr>
-        <p:spPr>
-          <a:xfrm>
-            <a:off x="640080" y="4160520"/>
-            <a:ext cx="5394960" cy="1920240"/>
-          </a:xfrm>
-          <a:prstGeom prst="rect">
-            <a:avLst/>
-          </a:prstGeom>
-          <a:solidFill>
-            <a:srgbClr val="2E1E10"/>
-          </a:solidFill>
-          <a:ln>
-            <a:noFill/>
-          </a:ln>
-        </p:spPr>
-        <p:style>
-          <a:lnRef idx="1">
-            <a:schemeClr val="accent1"/>
-          </a:lnRef>
-          <a:fillRef idx="3">
-            <a:schemeClr val="accent1"/>
-          </a:fillRef>
-          <a:effectRef idx="2">
-            <a:schemeClr val="accent1"/>
-          </a:effectRef>
-          <a:fontRef idx="minor">
-            <a:schemeClr val="lt1"/>
-          </a:fontRef>
-        </p:style>
-        <p:txBody>
-          <a:bodyPr rtlCol="0" anchor="ctr"/>
-          <a:lstStyle/>
-          <a:p>
-            <a:pPr algn="ctr"/>
-          </a:p>
-        </p:txBody>
-      </p:sp>
-      <p:sp>
-        <p:nvSpPr>
-          <p:cNvPr id="13" name="TextBox 12"/>
-          <p:cNvSpPr txBox="1"/>
-          <p:nvPr/>
-        </p:nvSpPr>
-        <p:spPr>
-          <a:xfrm>
-            <a:off x="777240" y="4270248"/>
-            <a:ext cx="5120640" cy="411480"/>
-          </a:xfrm>
-          <a:prstGeom prst="rect">
-            <a:avLst/>
-          </a:prstGeom>
-          <a:noFill/>
-        </p:spPr>
-        <p:txBody>
-          <a:bodyPr wrap="square">
-            <a:spAutoFit/>
-          </a:bodyPr>
-          <a:lstStyle/>
-          <a:p>
-            <a:pPr algn="l"/>
-            <a:r>
-              <a:rPr sz="1500" b="1" i="0">
-                <a:solidFill>
-                  <a:srgbClr val="F5D78E"/>
-                </a:solidFill>
-              </a:rPr>
-              <a:t>Building the model</a:t>
-            </a:r>
-          </a:p>
-        </p:txBody>
-      </p:sp>
-      <p:sp>
-        <p:nvSpPr>
-          <p:cNvPr id="14" name="TextBox 13"/>
-          <p:cNvSpPr txBox="1"/>
-          <p:nvPr/>
-        </p:nvSpPr>
-        <p:spPr>
-          <a:xfrm>
-            <a:off x="685800" y="4663440"/>
-            <a:ext cx="5257800" cy="1280160"/>
-          </a:xfrm>
-          <a:prstGeom prst="rect">
-            <a:avLst/>
-          </a:prstGeom>
-          <a:noFill/>
-        </p:spPr>
-        <p:txBody>
-          <a:bodyPr wrap="square">
-            <a:spAutoFit/>
-          </a:bodyPr>
-          <a:lstStyle/>
-          <a:p>
-            <a:pPr algn="l"/>
-            <a:r>
-              <a:rPr sz="1300">
-                <a:solidFill>
-                  <a:srgbClr val="F5F0E8"/>
-                </a:solidFill>
-              </a:rPr>
-              <a:t>  •  TF-IDF is simple but surprisingly effective for text matching.</a:t>
-            </a:r>
-          </a:p>
-          <a:p>
-            <a:pPr algn="l"/>
-            <a:r>
-              <a:rPr sz="1300">
-                <a:solidFill>
-                  <a:srgbClr val="F5F0E8"/>
-                </a:solidFill>
-              </a:rPr>
-              <a:t>  •  Tuning what to include in the vectoriser (title only vs title + description) made a big difference.</a:t>
-            </a:r>
-          </a:p>
-        </p:txBody>
-      </p:sp>
-      <p:sp>
-        <p:nvSpPr>
-          <p:cNvPr id="15" name="Rectangle 14"/>
-          <p:cNvSpPr/>
-          <p:nvPr/>
-        </p:nvSpPr>
-        <p:spPr>
-          <a:xfrm>
-            <a:off x="6400800" y="4160520"/>
-            <a:ext cx="5394960" cy="1920240"/>
-          </a:xfrm>
-          <a:prstGeom prst="rect">
-            <a:avLst/>
-          </a:prstGeom>
-          <a:solidFill>
-            <a:srgbClr val="2E1E10"/>
-          </a:solidFill>
-          <a:ln>
-            <a:noFill/>
-          </a:ln>
-        </p:spPr>
-        <p:style>
-          <a:lnRef idx="1">
-            <a:schemeClr val="accent1"/>
-          </a:lnRef>
-          <a:fillRef idx="3">
-            <a:schemeClr val="accent1"/>
-          </a:fillRef>
-          <a:effectRef idx="2">
-            <a:schemeClr val="accent1"/>
-          </a:effectRef>
-          <a:fontRef idx="minor">
-            <a:schemeClr val="lt1"/>
-          </a:fontRef>
-        </p:style>
-        <p:txBody>
-          <a:bodyPr rtlCol="0" anchor="ctr"/>
-          <a:lstStyle/>
-          <a:p>
-            <a:pPr algn="ctr"/>
-          </a:p>
-        </p:txBody>
-      </p:sp>
-      <p:sp>
-        <p:nvSpPr>
-          <p:cNvPr id="16" name="TextBox 15"/>
-          <p:cNvSpPr txBox="1"/>
-          <p:nvPr/>
-        </p:nvSpPr>
-        <p:spPr>
-          <a:xfrm>
-            <a:off x="6537960" y="4270248"/>
-            <a:ext cx="5120640" cy="411480"/>
-          </a:xfrm>
-          <a:prstGeom prst="rect">
-            <a:avLst/>
-          </a:prstGeom>
-          <a:noFill/>
-        </p:spPr>
-        <p:txBody>
-          <a:bodyPr wrap="square">
-            <a:spAutoFit/>
-          </a:bodyPr>
-          <a:lstStyle/>
-          <a:p>
-            <a:pPr algn="l"/>
-            <a:r>
-              <a:rPr sz="1500" b="1" i="0">
-                <a:solidFill>
-                  <a:srgbClr val="F5D78E"/>
-                </a:solidFill>
-              </a:rPr>
-              <a:t>The app</a:t>
-            </a:r>
-          </a:p>
-        </p:txBody>
-      </p:sp>
-      <p:sp>
-        <p:nvSpPr>
-          <p:cNvPr id="17" name="TextBox 16"/>
-          <p:cNvSpPr txBox="1"/>
-          <p:nvPr/>
-        </p:nvSpPr>
-        <p:spPr>
-          <a:xfrm>
-            <a:off x="6446520" y="4663440"/>
-            <a:ext cx="5257800" cy="1280160"/>
-          </a:xfrm>
-          <a:prstGeom prst="rect">
-            <a:avLst/>
-          </a:prstGeom>
-          <a:noFill/>
-        </p:spPr>
-        <p:txBody>
-          <a:bodyPr wrap="square">
-            <a:spAutoFit/>
-          </a:bodyPr>
-          <a:lstStyle/>
-          <a:p>
-            <a:pPr algn="l"/>
-            <a:r>
-              <a:rPr sz="1300">
-                <a:solidFill>
-                  <a:srgbClr val="F5F0E8"/>
-                </a:solidFill>
-              </a:rPr>
-              <a:t>  •  Connecting the recommender to Streamlit was smooth.</a:t>
-            </a:r>
-          </a:p>
-          <a:p>
-            <a:pPr algn="l"/>
-            <a:r>
-              <a:rPr sz="1300">
-                <a:solidFill>
-                  <a:srgbClr val="F5F0E8"/>
-                </a:solidFill>
-              </a:rPr>
-              <a:t>  •  Cover images from Open Library added life to the results — but not all books have covers.</a:t>
-            </a:r>
-          </a:p>
-        </p:txBody>
-      </p:sp>
-      <p:sp>
-        <p:nvSpPr>
-          <p:cNvPr id="18" name="TextBox 17"/>
-          <p:cNvSpPr txBox="1"/>
-          <p:nvPr/>
-        </p:nvSpPr>
-        <p:spPr>
-          <a:xfrm>
-            <a:off x="11155680" y="6492240"/>
-            <a:ext cx="914400" cy="320040"/>
-          </a:xfrm>
-          <a:prstGeom prst="rect">
-            <a:avLst/>
-          </a:prstGeom>
-          <a:noFill/>
-        </p:spPr>
-        <p:txBody>
-          <a:bodyPr wrap="square">
-            <a:spAutoFit/>
-          </a:bodyPr>
-          <a:lstStyle/>
-          <a:p>
             <a:pPr algn="r"/>
             <a:r>
               <a:rPr sz="1100" b="0" i="0">
@@ -5894,7 +5697,7 @@
                   <a:srgbClr val="D4C5A9"/>
                 </a:solidFill>
               </a:rPr>
-              <a:t>5 / 7</a:t>
+              <a:t>5 / 8</a:t>
             </a:r>
           </a:p>
         </p:txBody>
@@ -6040,7 +5843,7 @@
                   <a:srgbClr val="F5D78E"/>
                 </a:solidFill>
               </a:rPr>
-              <a:t>THE PRODUCT</a:t>
+              <a:t>THE JOURNEY</a:t>
             </a:r>
           </a:p>
         </p:txBody>
@@ -6074,240 +5877,27 @@
                   <a:srgbClr val="F5F0E8"/>
                 </a:solidFill>
               </a:rPr>
-              <a:t>Who it's for — and why it matters</a:t>
-            </a:r>
-          </a:p>
-        </p:txBody>
-      </p:sp>
-      <p:sp>
-        <p:nvSpPr>
-          <p:cNvPr id="6" name="TextBox 5"/>
-          <p:cNvSpPr txBox="1"/>
-          <p:nvPr/>
-        </p:nvSpPr>
-        <p:spPr>
-          <a:xfrm>
-            <a:off x="640080" y="1600200"/>
-            <a:ext cx="5303520" cy="457200"/>
-          </a:xfrm>
-          <a:prstGeom prst="rect">
-            <a:avLst/>
-          </a:prstGeom>
-          <a:noFill/>
-        </p:spPr>
-        <p:txBody>
-          <a:bodyPr wrap="square">
-            <a:spAutoFit/>
-          </a:bodyPr>
-          <a:lstStyle/>
-          <a:p>
-            <a:pPr algn="l"/>
-            <a:r>
-              <a:rPr sz="1700" b="1" i="0">
-                <a:solidFill>
-                  <a:srgbClr val="F5D78E"/>
-                </a:solidFill>
-              </a:rPr>
-              <a:t>The audience</a:t>
-            </a:r>
-          </a:p>
-        </p:txBody>
-      </p:sp>
-      <p:sp>
-        <p:nvSpPr>
-          <p:cNvPr id="7" name="TextBox 6"/>
-          <p:cNvSpPr txBox="1"/>
-          <p:nvPr/>
-        </p:nvSpPr>
-        <p:spPr>
-          <a:xfrm>
-            <a:off x="640080" y="2011680"/>
-            <a:ext cx="5303520" cy="3474720"/>
-          </a:xfrm>
-          <a:prstGeom prst="rect">
-            <a:avLst/>
-          </a:prstGeom>
-          <a:noFill/>
-        </p:spPr>
-        <p:txBody>
-          <a:bodyPr wrap="square">
-            <a:spAutoFit/>
-          </a:bodyPr>
-          <a:lstStyle/>
-          <a:p>
-            <a:pPr algn="l"/>
-            <a:r>
-              <a:rPr sz="1700">
-                <a:solidFill>
-                  <a:srgbClr val="F5F0E8"/>
-                </a:solidFill>
-              </a:rPr>
-              <a:t>  •  Readers who already know they want 'something like Naomi Klein'.</a:t>
-            </a:r>
-          </a:p>
-          <a:p>
-            <a:pPr algn="l"/>
-            <a:r>
-              <a:rPr sz="1700">
-                <a:solidFill>
-                  <a:srgbClr val="F5F0E8"/>
-                </a:solidFill>
-              </a:rPr>
-              <a:t>  •  Students and researchers navigating critical theory for the first time.</a:t>
-            </a:r>
-          </a:p>
-          <a:p>
-            <a:pPr algn="l"/>
-            <a:r>
-              <a:rPr sz="1700">
-                <a:solidFill>
-                  <a:srgbClr val="F5F0E8"/>
-                </a:solidFill>
-              </a:rPr>
-              <a:t>  •  Activists and organisers looking for reading lists.</a:t>
-            </a:r>
-          </a:p>
-          <a:p>
-            <a:pPr algn="l"/>
-            <a:r>
-              <a:rPr sz="1700">
-                <a:solidFill>
-                  <a:srgbClr val="F5F0E8"/>
-                </a:solidFill>
-              </a:rPr>
-              <a:t>  •  Anyone who's frustrated that Goodreads keeps recommending the same 10 books.</a:t>
-            </a:r>
-          </a:p>
-        </p:txBody>
-      </p:sp>
-      <p:sp>
-        <p:nvSpPr>
-          <p:cNvPr id="8" name="TextBox 7"/>
-          <p:cNvSpPr txBox="1"/>
-          <p:nvPr/>
-        </p:nvSpPr>
-        <p:spPr>
-          <a:xfrm>
-            <a:off x="6217920" y="1600200"/>
-            <a:ext cx="5486400" cy="457200"/>
-          </a:xfrm>
-          <a:prstGeom prst="rect">
-            <a:avLst/>
-          </a:prstGeom>
-          <a:noFill/>
-        </p:spPr>
-        <p:txBody>
-          <a:bodyPr wrap="square">
-            <a:spAutoFit/>
-          </a:bodyPr>
-          <a:lstStyle/>
-          <a:p>
-            <a:pPr algn="l"/>
-            <a:r>
-              <a:rPr sz="1700" b="1" i="0">
-                <a:solidFill>
-                  <a:srgbClr val="F5D78E"/>
-                </a:solidFill>
-              </a:rPr>
-              <a:t>Why it's valuable</a:t>
-            </a:r>
-          </a:p>
-        </p:txBody>
-      </p:sp>
-      <p:sp>
-        <p:nvSpPr>
-          <p:cNvPr id="9" name="TextBox 8"/>
-          <p:cNvSpPr txBox="1"/>
-          <p:nvPr/>
-        </p:nvSpPr>
-        <p:spPr>
-          <a:xfrm>
-            <a:off x="6217920" y="2011680"/>
-            <a:ext cx="5486400" cy="3474720"/>
-          </a:xfrm>
-          <a:prstGeom prst="rect">
-            <a:avLst/>
-          </a:prstGeom>
-          <a:noFill/>
-        </p:spPr>
-        <p:txBody>
-          <a:bodyPr wrap="square">
-            <a:spAutoFit/>
-          </a:bodyPr>
-          <a:lstStyle/>
-          <a:p>
-            <a:pPr algn="l"/>
-            <a:r>
-              <a:rPr sz="1700">
-                <a:solidFill>
-                  <a:srgbClr val="F5F0E8"/>
-                </a:solidFill>
-              </a:rPr>
-              <a:t>  •  Saves hours of browsing and searching.</a:t>
-            </a:r>
-          </a:p>
-          <a:p>
-            <a:pPr algn="l"/>
-            <a:r>
-              <a:rPr sz="1700">
-                <a:solidFill>
-                  <a:srgbClr val="F5F0E8"/>
-                </a:solidFill>
-              </a:rPr>
-              <a:t>  •  Surfaces authors you'd never find on your own.</a:t>
-            </a:r>
-          </a:p>
-          <a:p>
-            <a:pPr algn="l"/>
-            <a:r>
-              <a:rPr sz="1700">
-                <a:solidFill>
-                  <a:srgbClr val="F5F0E8"/>
-                </a:solidFill>
-              </a:rPr>
-              <a:t>  •  Works by topic, author, or free-text keyword — flexible for different needs.</a:t>
-            </a:r>
-          </a:p>
-          <a:p>
-            <a:pPr algn="l"/>
-            <a:r>
-              <a:rPr sz="1700">
-                <a:solidFill>
-                  <a:srgbClr val="F5F0E8"/>
-                </a:solidFill>
-              </a:rPr>
-              <a:t>  •  Brings a marginalised genre into the same UX quality as mainstream recommenders.</a:t>
-            </a:r>
-          </a:p>
-          <a:p>
-            <a:pPr algn="l"/>
-            <a:r>
-              <a:rPr sz="1700">
-                <a:solidFill>
-                  <a:srgbClr val="F5F0E8"/>
-                </a:solidFill>
-              </a:rPr>
-              <a:t>  •  Free, open, and accessible in the browser — no account needed.</a:t>
-            </a:r>
-          </a:p>
-        </p:txBody>
-      </p:sp>
-      <p:sp>
-        <p:nvSpPr>
-          <p:cNvPr id="10" name="Rectangle 9"/>
+              <a:t>What the process actually looked like</a:t>
+            </a:r>
+          </a:p>
+        </p:txBody>
+      </p:sp>
+      <p:sp>
+        <p:nvSpPr>
+          <p:cNvPr id="6" name="Rectangle 5"/>
           <p:cNvSpPr/>
           <p:nvPr/>
         </p:nvSpPr>
         <p:spPr>
           <a:xfrm>
-            <a:off x="5943600" y="1554480"/>
-            <a:ext cx="36576" cy="4572000"/>
+            <a:off x="640080" y="1965960"/>
+            <a:ext cx="5394960" cy="1920240"/>
           </a:xfrm>
           <a:prstGeom prst="rect">
             <a:avLst/>
           </a:prstGeom>
           <a:solidFill>
-            <a:srgbClr val="5C4208"/>
+            <a:srgbClr val="2E1E10"/>
           </a:solidFill>
           <a:ln>
             <a:noFill/>
@@ -6337,14 +5927,14 @@
       </p:sp>
       <p:sp>
         <p:nvSpPr>
-          <p:cNvPr id="11" name="TextBox 10"/>
+          <p:cNvPr id="7" name="TextBox 6"/>
           <p:cNvSpPr txBox="1"/>
           <p:nvPr/>
         </p:nvSpPr>
         <p:spPr>
           <a:xfrm>
-            <a:off x="11155680" y="6492240"/>
-            <a:ext cx="914400" cy="320040"/>
+            <a:off x="777240" y="2075688"/>
+            <a:ext cx="5120640" cy="411480"/>
           </a:xfrm>
           <a:prstGeom prst="rect">
             <a:avLst/>
@@ -6357,6 +5947,451 @@
           </a:bodyPr>
           <a:lstStyle/>
           <a:p>
+            <a:pPr algn="l"/>
+            <a:r>
+              <a:rPr sz="1500" b="1" i="0">
+                <a:solidFill>
+                  <a:srgbClr val="F5D78E"/>
+                </a:solidFill>
+              </a:rPr>
+              <a:t>Data collection</a:t>
+            </a:r>
+          </a:p>
+        </p:txBody>
+      </p:sp>
+      <p:sp>
+        <p:nvSpPr>
+          <p:cNvPr id="8" name="TextBox 7"/>
+          <p:cNvSpPr txBox="1"/>
+          <p:nvPr/>
+        </p:nvSpPr>
+        <p:spPr>
+          <a:xfrm>
+            <a:off x="685800" y="2468880"/>
+            <a:ext cx="5257800" cy="1280160"/>
+          </a:xfrm>
+          <a:prstGeom prst="rect">
+            <a:avLst/>
+          </a:prstGeom>
+          <a:noFill/>
+        </p:spPr>
+        <p:txBody>
+          <a:bodyPr wrap="square">
+            <a:spAutoFit/>
+          </a:bodyPr>
+          <a:lstStyle/>
+          <a:p>
+            <a:pPr algn="l"/>
+            <a:r>
+              <a:rPr sz="1300">
+                <a:solidFill>
+                  <a:srgbClr val="F5F0E8"/>
+                </a:solidFill>
+              </a:rPr>
+              <a:t>  •  Hit API rate limits repeatedly — had to slow down and batch requests.</a:t>
+            </a:r>
+          </a:p>
+          <a:p>
+            <a:pPr algn="l"/>
+            <a:r>
+              <a:rPr sz="1300">
+                <a:solidFill>
+                  <a:srgbClr val="F5F0E8"/>
+                </a:solidFill>
+              </a:rPr>
+              <a:t>  •  Scraped two sources and merged them, with lots of duplicate noise.</a:t>
+            </a:r>
+          </a:p>
+        </p:txBody>
+      </p:sp>
+      <p:sp>
+        <p:nvSpPr>
+          <p:cNvPr id="9" name="Rectangle 8"/>
+          <p:cNvSpPr/>
+          <p:nvPr/>
+        </p:nvSpPr>
+        <p:spPr>
+          <a:xfrm>
+            <a:off x="6400800" y="1965960"/>
+            <a:ext cx="5394960" cy="1920240"/>
+          </a:xfrm>
+          <a:prstGeom prst="rect">
+            <a:avLst/>
+          </a:prstGeom>
+          <a:solidFill>
+            <a:srgbClr val="2E1E10"/>
+          </a:solidFill>
+          <a:ln>
+            <a:noFill/>
+          </a:ln>
+        </p:spPr>
+        <p:style>
+          <a:lnRef idx="1">
+            <a:schemeClr val="accent1"/>
+          </a:lnRef>
+          <a:fillRef idx="3">
+            <a:schemeClr val="accent1"/>
+          </a:fillRef>
+          <a:effectRef idx="2">
+            <a:schemeClr val="accent1"/>
+          </a:effectRef>
+          <a:fontRef idx="minor">
+            <a:schemeClr val="lt1"/>
+          </a:fontRef>
+        </p:style>
+        <p:txBody>
+          <a:bodyPr rtlCol="0" anchor="ctr"/>
+          <a:lstStyle/>
+          <a:p>
+            <a:pPr algn="ctr"/>
+          </a:p>
+        </p:txBody>
+      </p:sp>
+      <p:sp>
+        <p:nvSpPr>
+          <p:cNvPr id="10" name="TextBox 9"/>
+          <p:cNvSpPr txBox="1"/>
+          <p:nvPr/>
+        </p:nvSpPr>
+        <p:spPr>
+          <a:xfrm>
+            <a:off x="6537960" y="2075688"/>
+            <a:ext cx="5120640" cy="411480"/>
+          </a:xfrm>
+          <a:prstGeom prst="rect">
+            <a:avLst/>
+          </a:prstGeom>
+          <a:noFill/>
+        </p:spPr>
+        <p:txBody>
+          <a:bodyPr wrap="square">
+            <a:spAutoFit/>
+          </a:bodyPr>
+          <a:lstStyle/>
+          <a:p>
+            <a:pPr algn="l"/>
+            <a:r>
+              <a:rPr sz="1500" b="1" i="0">
+                <a:solidFill>
+                  <a:srgbClr val="F5D78E"/>
+                </a:solidFill>
+              </a:rPr>
+              <a:t>Data cleaning</a:t>
+            </a:r>
+          </a:p>
+        </p:txBody>
+      </p:sp>
+      <p:sp>
+        <p:nvSpPr>
+          <p:cNvPr id="11" name="TextBox 10"/>
+          <p:cNvSpPr txBox="1"/>
+          <p:nvPr/>
+        </p:nvSpPr>
+        <p:spPr>
+          <a:xfrm>
+            <a:off x="6446520" y="2468880"/>
+            <a:ext cx="5257800" cy="1280160"/>
+          </a:xfrm>
+          <a:prstGeom prst="rect">
+            <a:avLst/>
+          </a:prstGeom>
+          <a:noFill/>
+        </p:spPr>
+        <p:txBody>
+          <a:bodyPr wrap="square">
+            <a:spAutoFit/>
+          </a:bodyPr>
+          <a:lstStyle/>
+          <a:p>
+            <a:pPr algn="l"/>
+            <a:r>
+              <a:rPr sz="1300">
+                <a:solidFill>
+                  <a:srgbClr val="F5F0E8"/>
+                </a:solidFill>
+              </a:rPr>
+              <a:t>  •  Inconsistent author names, missing descriptions, broken years.</a:t>
+            </a:r>
+          </a:p>
+          <a:p>
+            <a:pPr algn="l"/>
+            <a:r>
+              <a:rPr sz="1300">
+                <a:solidFill>
+                  <a:srgbClr val="F5F0E8"/>
+                </a:solidFill>
+              </a:rPr>
+              <a:t>  •  Manually reviewed edge cases — some 'books' were study guides or Wikipedia dumps.</a:t>
+            </a:r>
+          </a:p>
+        </p:txBody>
+      </p:sp>
+      <p:sp>
+        <p:nvSpPr>
+          <p:cNvPr id="12" name="Rectangle 11"/>
+          <p:cNvSpPr/>
+          <p:nvPr/>
+        </p:nvSpPr>
+        <p:spPr>
+          <a:xfrm>
+            <a:off x="640080" y="4160520"/>
+            <a:ext cx="5394960" cy="1920240"/>
+          </a:xfrm>
+          <a:prstGeom prst="rect">
+            <a:avLst/>
+          </a:prstGeom>
+          <a:solidFill>
+            <a:srgbClr val="2E1E10"/>
+          </a:solidFill>
+          <a:ln>
+            <a:noFill/>
+          </a:ln>
+        </p:spPr>
+        <p:style>
+          <a:lnRef idx="1">
+            <a:schemeClr val="accent1"/>
+          </a:lnRef>
+          <a:fillRef idx="3">
+            <a:schemeClr val="accent1"/>
+          </a:fillRef>
+          <a:effectRef idx="2">
+            <a:schemeClr val="accent1"/>
+          </a:effectRef>
+          <a:fontRef idx="minor">
+            <a:schemeClr val="lt1"/>
+          </a:fontRef>
+        </p:style>
+        <p:txBody>
+          <a:bodyPr rtlCol="0" anchor="ctr"/>
+          <a:lstStyle/>
+          <a:p>
+            <a:pPr algn="ctr"/>
+          </a:p>
+        </p:txBody>
+      </p:sp>
+      <p:sp>
+        <p:nvSpPr>
+          <p:cNvPr id="13" name="TextBox 12"/>
+          <p:cNvSpPr txBox="1"/>
+          <p:nvPr/>
+        </p:nvSpPr>
+        <p:spPr>
+          <a:xfrm>
+            <a:off x="777240" y="4270248"/>
+            <a:ext cx="5120640" cy="411480"/>
+          </a:xfrm>
+          <a:prstGeom prst="rect">
+            <a:avLst/>
+          </a:prstGeom>
+          <a:noFill/>
+        </p:spPr>
+        <p:txBody>
+          <a:bodyPr wrap="square">
+            <a:spAutoFit/>
+          </a:bodyPr>
+          <a:lstStyle/>
+          <a:p>
+            <a:pPr algn="l"/>
+            <a:r>
+              <a:rPr sz="1500" b="1" i="0">
+                <a:solidFill>
+                  <a:srgbClr val="F5D78E"/>
+                </a:solidFill>
+              </a:rPr>
+              <a:t>Building the model</a:t>
+            </a:r>
+          </a:p>
+        </p:txBody>
+      </p:sp>
+      <p:sp>
+        <p:nvSpPr>
+          <p:cNvPr id="14" name="TextBox 13"/>
+          <p:cNvSpPr txBox="1"/>
+          <p:nvPr/>
+        </p:nvSpPr>
+        <p:spPr>
+          <a:xfrm>
+            <a:off x="685800" y="4663440"/>
+            <a:ext cx="5257800" cy="1280160"/>
+          </a:xfrm>
+          <a:prstGeom prst="rect">
+            <a:avLst/>
+          </a:prstGeom>
+          <a:noFill/>
+        </p:spPr>
+        <p:txBody>
+          <a:bodyPr wrap="square">
+            <a:spAutoFit/>
+          </a:bodyPr>
+          <a:lstStyle/>
+          <a:p>
+            <a:pPr algn="l"/>
+            <a:r>
+              <a:rPr sz="1300">
+                <a:solidFill>
+                  <a:srgbClr val="F5F0E8"/>
+                </a:solidFill>
+              </a:rPr>
+              <a:t>  •  TF-IDF is simple but surprisingly effective for text matching.</a:t>
+            </a:r>
+          </a:p>
+          <a:p>
+            <a:pPr algn="l"/>
+            <a:r>
+              <a:rPr sz="1300">
+                <a:solidFill>
+                  <a:srgbClr val="F5F0E8"/>
+                </a:solidFill>
+              </a:rPr>
+              <a:t>  •  Tuning what to include in the vectoriser (title only vs title + description) made a big difference.</a:t>
+            </a:r>
+          </a:p>
+        </p:txBody>
+      </p:sp>
+      <p:sp>
+        <p:nvSpPr>
+          <p:cNvPr id="15" name="Rectangle 14"/>
+          <p:cNvSpPr/>
+          <p:nvPr/>
+        </p:nvSpPr>
+        <p:spPr>
+          <a:xfrm>
+            <a:off x="6400800" y="4160520"/>
+            <a:ext cx="5394960" cy="1920240"/>
+          </a:xfrm>
+          <a:prstGeom prst="rect">
+            <a:avLst/>
+          </a:prstGeom>
+          <a:solidFill>
+            <a:srgbClr val="2E1E10"/>
+          </a:solidFill>
+          <a:ln>
+            <a:noFill/>
+          </a:ln>
+        </p:spPr>
+        <p:style>
+          <a:lnRef idx="1">
+            <a:schemeClr val="accent1"/>
+          </a:lnRef>
+          <a:fillRef idx="3">
+            <a:schemeClr val="accent1"/>
+          </a:fillRef>
+          <a:effectRef idx="2">
+            <a:schemeClr val="accent1"/>
+          </a:effectRef>
+          <a:fontRef idx="minor">
+            <a:schemeClr val="lt1"/>
+          </a:fontRef>
+        </p:style>
+        <p:txBody>
+          <a:bodyPr rtlCol="0" anchor="ctr"/>
+          <a:lstStyle/>
+          <a:p>
+            <a:pPr algn="ctr"/>
+          </a:p>
+        </p:txBody>
+      </p:sp>
+      <p:sp>
+        <p:nvSpPr>
+          <p:cNvPr id="16" name="TextBox 15"/>
+          <p:cNvSpPr txBox="1"/>
+          <p:nvPr/>
+        </p:nvSpPr>
+        <p:spPr>
+          <a:xfrm>
+            <a:off x="6537960" y="4270248"/>
+            <a:ext cx="5120640" cy="411480"/>
+          </a:xfrm>
+          <a:prstGeom prst="rect">
+            <a:avLst/>
+          </a:prstGeom>
+          <a:noFill/>
+        </p:spPr>
+        <p:txBody>
+          <a:bodyPr wrap="square">
+            <a:spAutoFit/>
+          </a:bodyPr>
+          <a:lstStyle/>
+          <a:p>
+            <a:pPr algn="l"/>
+            <a:r>
+              <a:rPr sz="1500" b="1" i="0">
+                <a:solidFill>
+                  <a:srgbClr val="F5D78E"/>
+                </a:solidFill>
+              </a:rPr>
+              <a:t>The app</a:t>
+            </a:r>
+          </a:p>
+        </p:txBody>
+      </p:sp>
+      <p:sp>
+        <p:nvSpPr>
+          <p:cNvPr id="17" name="TextBox 16"/>
+          <p:cNvSpPr txBox="1"/>
+          <p:nvPr/>
+        </p:nvSpPr>
+        <p:spPr>
+          <a:xfrm>
+            <a:off x="6446520" y="4663440"/>
+            <a:ext cx="5257800" cy="1280160"/>
+          </a:xfrm>
+          <a:prstGeom prst="rect">
+            <a:avLst/>
+          </a:prstGeom>
+          <a:noFill/>
+        </p:spPr>
+        <p:txBody>
+          <a:bodyPr wrap="square">
+            <a:spAutoFit/>
+          </a:bodyPr>
+          <a:lstStyle/>
+          <a:p>
+            <a:pPr algn="l"/>
+            <a:r>
+              <a:rPr sz="1300">
+                <a:solidFill>
+                  <a:srgbClr val="F5F0E8"/>
+                </a:solidFill>
+              </a:rPr>
+              <a:t>  •  Connecting the recommender to Streamlit was smooth.</a:t>
+            </a:r>
+          </a:p>
+          <a:p>
+            <a:pPr algn="l"/>
+            <a:r>
+              <a:rPr sz="1300">
+                <a:solidFill>
+                  <a:srgbClr val="F5F0E8"/>
+                </a:solidFill>
+              </a:rPr>
+              <a:t>  •  Cover images from Open Library added life to the results — but not all books have covers.</a:t>
+            </a:r>
+          </a:p>
+        </p:txBody>
+      </p:sp>
+      <p:sp>
+        <p:nvSpPr>
+          <p:cNvPr id="18" name="TextBox 17"/>
+          <p:cNvSpPr txBox="1"/>
+          <p:nvPr/>
+        </p:nvSpPr>
+        <p:spPr>
+          <a:xfrm>
+            <a:off x="11155680" y="6492240"/>
+            <a:ext cx="914400" cy="320040"/>
+          </a:xfrm>
+          <a:prstGeom prst="rect">
+            <a:avLst/>
+          </a:prstGeom>
+          <a:noFill/>
+        </p:spPr>
+        <p:txBody>
+          <a:bodyPr wrap="square">
+            <a:spAutoFit/>
+          </a:bodyPr>
+          <a:lstStyle/>
+          <a:p>
             <a:pPr algn="r"/>
             <a:r>
               <a:rPr sz="1100" b="0" i="0">
@@ -6364,7 +6399,7 @@
                   <a:srgbClr val="D4C5A9"/>
                 </a:solidFill>
               </a:rPr>
-              <a:t>6 / 7</a:t>
+              <a:t>6 / 8</a:t>
             </a:r>
           </a:p>
         </p:txBody>
@@ -6510,6 +6545,476 @@
                   <a:srgbClr val="F5D78E"/>
                 </a:solidFill>
               </a:rPr>
+              <a:t>THE PRODUCT</a:t>
+            </a:r>
+          </a:p>
+        </p:txBody>
+      </p:sp>
+      <p:sp>
+        <p:nvSpPr>
+          <p:cNvPr id="5" name="TextBox 4"/>
+          <p:cNvSpPr txBox="1"/>
+          <p:nvPr/>
+        </p:nvSpPr>
+        <p:spPr>
+          <a:xfrm>
+            <a:off x="640080" y="548640"/>
+            <a:ext cx="10058400" cy="914400"/>
+          </a:xfrm>
+          <a:prstGeom prst="rect">
+            <a:avLst/>
+          </a:prstGeom>
+          <a:noFill/>
+        </p:spPr>
+        <p:txBody>
+          <a:bodyPr wrap="square">
+            <a:spAutoFit/>
+          </a:bodyPr>
+          <a:lstStyle/>
+          <a:p>
+            <a:pPr algn="l"/>
+            <a:r>
+              <a:rPr sz="3800" b="1" i="0">
+                <a:solidFill>
+                  <a:srgbClr val="F5F0E8"/>
+                </a:solidFill>
+              </a:rPr>
+              <a:t>Who it's for — and why it matters</a:t>
+            </a:r>
+          </a:p>
+        </p:txBody>
+      </p:sp>
+      <p:sp>
+        <p:nvSpPr>
+          <p:cNvPr id="6" name="TextBox 5"/>
+          <p:cNvSpPr txBox="1"/>
+          <p:nvPr/>
+        </p:nvSpPr>
+        <p:spPr>
+          <a:xfrm>
+            <a:off x="640080" y="1600200"/>
+            <a:ext cx="5303520" cy="457200"/>
+          </a:xfrm>
+          <a:prstGeom prst="rect">
+            <a:avLst/>
+          </a:prstGeom>
+          <a:noFill/>
+        </p:spPr>
+        <p:txBody>
+          <a:bodyPr wrap="square">
+            <a:spAutoFit/>
+          </a:bodyPr>
+          <a:lstStyle/>
+          <a:p>
+            <a:pPr algn="l"/>
+            <a:r>
+              <a:rPr sz="1700" b="1" i="0">
+                <a:solidFill>
+                  <a:srgbClr val="F5D78E"/>
+                </a:solidFill>
+              </a:rPr>
+              <a:t>The audience</a:t>
+            </a:r>
+          </a:p>
+        </p:txBody>
+      </p:sp>
+      <p:sp>
+        <p:nvSpPr>
+          <p:cNvPr id="7" name="TextBox 6"/>
+          <p:cNvSpPr txBox="1"/>
+          <p:nvPr/>
+        </p:nvSpPr>
+        <p:spPr>
+          <a:xfrm>
+            <a:off x="640080" y="2011680"/>
+            <a:ext cx="5303520" cy="3474720"/>
+          </a:xfrm>
+          <a:prstGeom prst="rect">
+            <a:avLst/>
+          </a:prstGeom>
+          <a:noFill/>
+        </p:spPr>
+        <p:txBody>
+          <a:bodyPr wrap="square">
+            <a:spAutoFit/>
+          </a:bodyPr>
+          <a:lstStyle/>
+          <a:p>
+            <a:pPr algn="l"/>
+            <a:r>
+              <a:rPr sz="1700">
+                <a:solidFill>
+                  <a:srgbClr val="F5F0E8"/>
+                </a:solidFill>
+              </a:rPr>
+              <a:t>  •  Readers who already know they want 'something like Naomi Klein'.</a:t>
+            </a:r>
+          </a:p>
+          <a:p>
+            <a:pPr algn="l"/>
+            <a:r>
+              <a:rPr sz="1700">
+                <a:solidFill>
+                  <a:srgbClr val="F5F0E8"/>
+                </a:solidFill>
+              </a:rPr>
+              <a:t>  •  Students and researchers navigating critical theory for the first time.</a:t>
+            </a:r>
+          </a:p>
+          <a:p>
+            <a:pPr algn="l"/>
+            <a:r>
+              <a:rPr sz="1700">
+                <a:solidFill>
+                  <a:srgbClr val="F5F0E8"/>
+                </a:solidFill>
+              </a:rPr>
+              <a:t>  •  Activists and organisers looking for reading lists.</a:t>
+            </a:r>
+          </a:p>
+          <a:p>
+            <a:pPr algn="l"/>
+            <a:r>
+              <a:rPr sz="1700">
+                <a:solidFill>
+                  <a:srgbClr val="F5F0E8"/>
+                </a:solidFill>
+              </a:rPr>
+              <a:t>  •  Anyone who's frustrated that Goodreads keeps recommending the same 10 books.</a:t>
+            </a:r>
+          </a:p>
+        </p:txBody>
+      </p:sp>
+      <p:sp>
+        <p:nvSpPr>
+          <p:cNvPr id="8" name="TextBox 7"/>
+          <p:cNvSpPr txBox="1"/>
+          <p:nvPr/>
+        </p:nvSpPr>
+        <p:spPr>
+          <a:xfrm>
+            <a:off x="6217920" y="1600200"/>
+            <a:ext cx="5486400" cy="457200"/>
+          </a:xfrm>
+          <a:prstGeom prst="rect">
+            <a:avLst/>
+          </a:prstGeom>
+          <a:noFill/>
+        </p:spPr>
+        <p:txBody>
+          <a:bodyPr wrap="square">
+            <a:spAutoFit/>
+          </a:bodyPr>
+          <a:lstStyle/>
+          <a:p>
+            <a:pPr algn="l"/>
+            <a:r>
+              <a:rPr sz="1700" b="1" i="0">
+                <a:solidFill>
+                  <a:srgbClr val="F5D78E"/>
+                </a:solidFill>
+              </a:rPr>
+              <a:t>Why it's valuable</a:t>
+            </a:r>
+          </a:p>
+        </p:txBody>
+      </p:sp>
+      <p:sp>
+        <p:nvSpPr>
+          <p:cNvPr id="9" name="TextBox 8"/>
+          <p:cNvSpPr txBox="1"/>
+          <p:nvPr/>
+        </p:nvSpPr>
+        <p:spPr>
+          <a:xfrm>
+            <a:off x="6217920" y="2011680"/>
+            <a:ext cx="5486400" cy="3474720"/>
+          </a:xfrm>
+          <a:prstGeom prst="rect">
+            <a:avLst/>
+          </a:prstGeom>
+          <a:noFill/>
+        </p:spPr>
+        <p:txBody>
+          <a:bodyPr wrap="square">
+            <a:spAutoFit/>
+          </a:bodyPr>
+          <a:lstStyle/>
+          <a:p>
+            <a:pPr algn="l"/>
+            <a:r>
+              <a:rPr sz="1700">
+                <a:solidFill>
+                  <a:srgbClr val="F5F0E8"/>
+                </a:solidFill>
+              </a:rPr>
+              <a:t>  •  Saves hours of browsing and searching.</a:t>
+            </a:r>
+          </a:p>
+          <a:p>
+            <a:pPr algn="l"/>
+            <a:r>
+              <a:rPr sz="1700">
+                <a:solidFill>
+                  <a:srgbClr val="F5F0E8"/>
+                </a:solidFill>
+              </a:rPr>
+              <a:t>  •  Surfaces authors you'd never find on your own.</a:t>
+            </a:r>
+          </a:p>
+          <a:p>
+            <a:pPr algn="l"/>
+            <a:r>
+              <a:rPr sz="1700">
+                <a:solidFill>
+                  <a:srgbClr val="F5F0E8"/>
+                </a:solidFill>
+              </a:rPr>
+              <a:t>  •  Works by topic, author, or free-text keyword — flexible for different needs.</a:t>
+            </a:r>
+          </a:p>
+          <a:p>
+            <a:pPr algn="l"/>
+            <a:r>
+              <a:rPr sz="1700">
+                <a:solidFill>
+                  <a:srgbClr val="F5F0E8"/>
+                </a:solidFill>
+              </a:rPr>
+              <a:t>  •  Brings a marginalised genre into the same UX quality as mainstream recommenders.</a:t>
+            </a:r>
+          </a:p>
+          <a:p>
+            <a:pPr algn="l"/>
+            <a:r>
+              <a:rPr sz="1700">
+                <a:solidFill>
+                  <a:srgbClr val="F5F0E8"/>
+                </a:solidFill>
+              </a:rPr>
+              <a:t>  •  Free, open, and accessible in the browser — no account needed.</a:t>
+            </a:r>
+          </a:p>
+        </p:txBody>
+      </p:sp>
+      <p:sp>
+        <p:nvSpPr>
+          <p:cNvPr id="10" name="Rectangle 9"/>
+          <p:cNvSpPr/>
+          <p:nvPr/>
+        </p:nvSpPr>
+        <p:spPr>
+          <a:xfrm>
+            <a:off x="5943600" y="1554480"/>
+            <a:ext cx="36576" cy="4572000"/>
+          </a:xfrm>
+          <a:prstGeom prst="rect">
+            <a:avLst/>
+          </a:prstGeom>
+          <a:solidFill>
+            <a:srgbClr val="5C4208"/>
+          </a:solidFill>
+          <a:ln>
+            <a:noFill/>
+          </a:ln>
+        </p:spPr>
+        <p:style>
+          <a:lnRef idx="1">
+            <a:schemeClr val="accent1"/>
+          </a:lnRef>
+          <a:fillRef idx="3">
+            <a:schemeClr val="accent1"/>
+          </a:fillRef>
+          <a:effectRef idx="2">
+            <a:schemeClr val="accent1"/>
+          </a:effectRef>
+          <a:fontRef idx="minor">
+            <a:schemeClr val="lt1"/>
+          </a:fontRef>
+        </p:style>
+        <p:txBody>
+          <a:bodyPr rtlCol="0" anchor="ctr"/>
+          <a:lstStyle/>
+          <a:p>
+            <a:pPr algn="ctr"/>
+          </a:p>
+        </p:txBody>
+      </p:sp>
+      <p:sp>
+        <p:nvSpPr>
+          <p:cNvPr id="11" name="TextBox 10"/>
+          <p:cNvSpPr txBox="1"/>
+          <p:nvPr/>
+        </p:nvSpPr>
+        <p:spPr>
+          <a:xfrm>
+            <a:off x="11155680" y="6492240"/>
+            <a:ext cx="914400" cy="320040"/>
+          </a:xfrm>
+          <a:prstGeom prst="rect">
+            <a:avLst/>
+          </a:prstGeom>
+          <a:noFill/>
+        </p:spPr>
+        <p:txBody>
+          <a:bodyPr wrap="square">
+            <a:spAutoFit/>
+          </a:bodyPr>
+          <a:lstStyle/>
+          <a:p>
+            <a:pPr algn="r"/>
+            <a:r>
+              <a:rPr sz="1100" b="0" i="0">
+                <a:solidFill>
+                  <a:srgbClr val="D4C5A9"/>
+                </a:solidFill>
+              </a:rPr>
+              <a:t>7 / 8</a:t>
+            </a:r>
+          </a:p>
+        </p:txBody>
+      </p:sp>
+    </p:spTree>
+  </p:cSld>
+  <p:clrMapOvr>
+    <a:masterClrMapping/>
+  </p:clrMapOvr>
+</p:sld>
+</file>
+
+<file path=ppt/slides/slide8.xml><?xml version="1.0" encoding="utf-8"?>
+<p:sld xmlns:a="http://schemas.openxmlformats.org/drawingml/2006/main" xmlns:p="http://schemas.openxmlformats.org/presentationml/2006/main" xmlns:r="http://schemas.openxmlformats.org/officeDocument/2006/relationships">
+  <p:cSld>
+    <p:bg>
+      <p:bgPr>
+        <a:solidFill>
+          <a:srgbClr val="1A1008"/>
+        </a:solidFill>
+        <a:effectLst/>
+      </p:bgPr>
+    </p:bg>
+    <p:spTree>
+      <p:nvGrpSpPr>
+        <p:cNvPr id="1" name=""/>
+        <p:cNvGrpSpPr/>
+        <p:nvPr/>
+      </p:nvGrpSpPr>
+      <p:grpSpPr/>
+      <p:sp>
+        <p:nvSpPr>
+          <p:cNvPr id="2" name="Rectangle 1"/>
+          <p:cNvSpPr/>
+          <p:nvPr/>
+        </p:nvSpPr>
+        <p:spPr>
+          <a:xfrm>
+            <a:off x="0" y="0"/>
+            <a:ext cx="320040" cy="6858000"/>
+          </a:xfrm>
+          <a:prstGeom prst="rect">
+            <a:avLst/>
+          </a:prstGeom>
+          <a:solidFill>
+            <a:srgbClr val="5C4208"/>
+          </a:solidFill>
+          <a:ln>
+            <a:noFill/>
+          </a:ln>
+        </p:spPr>
+        <p:style>
+          <a:lnRef idx="1">
+            <a:schemeClr val="accent1"/>
+          </a:lnRef>
+          <a:fillRef idx="3">
+            <a:schemeClr val="accent1"/>
+          </a:fillRef>
+          <a:effectRef idx="2">
+            <a:schemeClr val="accent1"/>
+          </a:effectRef>
+          <a:fontRef idx="minor">
+            <a:schemeClr val="lt1"/>
+          </a:fontRef>
+        </p:style>
+        <p:txBody>
+          <a:bodyPr rtlCol="0" anchor="ctr"/>
+          <a:lstStyle/>
+          <a:p>
+            <a:pPr algn="ctr"/>
+          </a:p>
+        </p:txBody>
+      </p:sp>
+      <p:sp>
+        <p:nvSpPr>
+          <p:cNvPr id="3" name="Rectangle 2"/>
+          <p:cNvSpPr/>
+          <p:nvPr/>
+        </p:nvSpPr>
+        <p:spPr>
+          <a:xfrm>
+            <a:off x="365760" y="1417320"/>
+            <a:ext cx="11430000" cy="36576"/>
+          </a:xfrm>
+          <a:prstGeom prst="rect">
+            <a:avLst/>
+          </a:prstGeom>
+          <a:solidFill>
+            <a:srgbClr val="F5D78E"/>
+          </a:solidFill>
+          <a:ln>
+            <a:noFill/>
+          </a:ln>
+        </p:spPr>
+        <p:style>
+          <a:lnRef idx="1">
+            <a:schemeClr val="accent1"/>
+          </a:lnRef>
+          <a:fillRef idx="3">
+            <a:schemeClr val="accent1"/>
+          </a:fillRef>
+          <a:effectRef idx="2">
+            <a:schemeClr val="accent1"/>
+          </a:effectRef>
+          <a:fontRef idx="minor">
+            <a:schemeClr val="lt1"/>
+          </a:fontRef>
+        </p:style>
+        <p:txBody>
+          <a:bodyPr rtlCol="0" anchor="ctr"/>
+          <a:lstStyle/>
+          <a:p>
+            <a:pPr algn="ctr"/>
+          </a:p>
+        </p:txBody>
+      </p:sp>
+      <p:sp>
+        <p:nvSpPr>
+          <p:cNvPr id="4" name="TextBox 3"/>
+          <p:cNvSpPr txBox="1"/>
+          <p:nvPr/>
+        </p:nvSpPr>
+        <p:spPr>
+          <a:xfrm>
+            <a:off x="640080" y="228600"/>
+            <a:ext cx="3657600" cy="365760"/>
+          </a:xfrm>
+          <a:prstGeom prst="rect">
+            <a:avLst/>
+          </a:prstGeom>
+          <a:noFill/>
+        </p:spPr>
+        <p:txBody>
+          <a:bodyPr wrap="square">
+            <a:spAutoFit/>
+          </a:bodyPr>
+          <a:lstStyle/>
+          <a:p>
+            <a:pPr algn="l"/>
+            <a:r>
+              <a:rPr sz="1100" b="1" i="0">
+                <a:solidFill>
+                  <a:srgbClr val="F5D78E"/>
+                </a:solidFill>
+              </a:rPr>
               <a:t>THE CHALLENGES</a:t>
             </a:r>
           </a:p>
@@ -7110,7 +7615,7 @@
                   <a:srgbClr val="D4C5A9"/>
                 </a:solidFill>
               </a:rPr>
-              <a:t>7 / 7</a:t>
+              <a:t>8 / 8</a:t>
             </a:r>
           </a:p>
         </p:txBody>
